--- a/Demo Project/Final_Presentation_2024TM93022.pptx
+++ b/Demo Project/Final_Presentation_2024TM93022.pptx
@@ -4,25 +4,28 @@
   <p:sldMasterIdLst>
     <p:sldMasterId id="2147483648" r:id="rId1"/>
   </p:sldMasterIdLst>
+  <p:notesMasterIdLst>
+    <p:notesMasterId r:id="rId18"/>
+  </p:notesMasterIdLst>
   <p:sldIdLst>
-    <p:sldId id="256" r:id="rId7"/>
-    <p:sldId id="257" r:id="rId8"/>
-    <p:sldId id="258" r:id="rId9"/>
-    <p:sldId id="259" r:id="rId10"/>
-    <p:sldId id="260" r:id="rId11"/>
-    <p:sldId id="261" r:id="rId12"/>
-    <p:sldId id="262" r:id="rId13"/>
-    <p:sldId id="263" r:id="rId14"/>
-    <p:sldId id="264" r:id="rId15"/>
-    <p:sldId id="265" r:id="rId16"/>
-    <p:sldId id="266" r:id="rId17"/>
-    <p:sldId id="267" r:id="rId18"/>
-    <p:sldId id="268" r:id="rId19"/>
-    <p:sldId id="269" r:id="rId20"/>
-    <p:sldId id="270" r:id="rId21"/>
-    <p:sldId id="271" r:id="rId22"/>
+    <p:sldId id="256" r:id="rId2"/>
+    <p:sldId id="257" r:id="rId3"/>
+    <p:sldId id="258" r:id="rId4"/>
+    <p:sldId id="259" r:id="rId5"/>
+    <p:sldId id="260" r:id="rId6"/>
+    <p:sldId id="261" r:id="rId7"/>
+    <p:sldId id="262" r:id="rId8"/>
+    <p:sldId id="263" r:id="rId9"/>
+    <p:sldId id="264" r:id="rId10"/>
+    <p:sldId id="265" r:id="rId11"/>
+    <p:sldId id="266" r:id="rId12"/>
+    <p:sldId id="267" r:id="rId13"/>
+    <p:sldId id="268" r:id="rId14"/>
+    <p:sldId id="269" r:id="rId15"/>
+    <p:sldId id="270" r:id="rId16"/>
+    <p:sldId id="271" r:id="rId17"/>
   </p:sldIdLst>
-  <p:sldSz cx="12188952" cy="6858000" type="screen4x3"/>
+  <p:sldSz cx="12188825" cy="6858000"/>
   <p:notesSz cx="6858000" cy="9144000"/>
   <p:defaultTextStyle>
     <a:defPPr>
@@ -119,7 +122,541 @@
       </a:defRPr>
     </a:lvl9pPr>
   </p:defaultTextStyle>
+  <p:extLst>
+    <p:ext uri="{EFAFB233-063F-42B5-8137-9DF3F51BA10A}">
+      <p15:sldGuideLst xmlns:p15="http://schemas.microsoft.com/office/powerpoint/2012/main">
+        <p15:guide id="1" orient="horz" pos="2160">
+          <p15:clr>
+            <a:srgbClr val="A4A3A4"/>
+          </p15:clr>
+        </p15:guide>
+        <p15:guide id="2" pos="2880">
+          <p15:clr>
+            <a:srgbClr val="A4A3A4"/>
+          </p15:clr>
+        </p15:guide>
+      </p15:sldGuideLst>
+    </p:ext>
+  </p:extLst>
 </p:presentation>
+</file>
+
+<file path=ppt/notesMasters/notesMaster1.xml><?xml version="1.0" encoding="utf-8"?>
+<p:notesMaster xmlns:a="http://schemas.openxmlformats.org/drawingml/2006/main" xmlns:r="http://schemas.openxmlformats.org/officeDocument/2006/relationships" xmlns:p="http://schemas.openxmlformats.org/presentationml/2006/main">
+  <p:cSld>
+    <p:bg>
+      <p:bgRef idx="1001">
+        <a:schemeClr val="bg1"/>
+      </p:bgRef>
+    </p:bg>
+    <p:spTree>
+      <p:nvGrpSpPr>
+        <p:cNvPr id="1" name=""/>
+        <p:cNvGrpSpPr/>
+        <p:nvPr/>
+      </p:nvGrpSpPr>
+      <p:grpSpPr>
+        <a:xfrm>
+          <a:off x="0" y="0"/>
+          <a:ext cx="0" cy="0"/>
+          <a:chOff x="0" y="0"/>
+          <a:chExt cx="0" cy="0"/>
+        </a:xfrm>
+      </p:grpSpPr>
+      <p:sp>
+        <p:nvSpPr>
+          <p:cNvPr id="2" name="Header Placeholder 1"/>
+          <p:cNvSpPr>
+            <a:spLocks noGrp="1"/>
+          </p:cNvSpPr>
+          <p:nvPr>
+            <p:ph type="hdr" sz="quarter"/>
+          </p:nvPr>
+        </p:nvSpPr>
+        <p:spPr>
+          <a:xfrm>
+            <a:off x="0" y="0"/>
+            <a:ext cx="2971800" cy="458788"/>
+          </a:xfrm>
+          <a:prstGeom prst="rect">
+            <a:avLst/>
+          </a:prstGeom>
+        </p:spPr>
+        <p:txBody>
+          <a:bodyPr vert="horz" lIns="91440" tIns="45720" rIns="91440" bIns="45720" rtlCol="0"/>
+          <a:lstStyle>
+            <a:lvl1pPr algn="l">
+              <a:defRPr sz="1200"/>
+            </a:lvl1pPr>
+          </a:lstStyle>
+          <a:p>
+            <a:endParaRPr lang="en-IN"/>
+          </a:p>
+        </p:txBody>
+      </p:sp>
+      <p:sp>
+        <p:nvSpPr>
+          <p:cNvPr id="3" name="Date Placeholder 2"/>
+          <p:cNvSpPr>
+            <a:spLocks noGrp="1"/>
+          </p:cNvSpPr>
+          <p:nvPr>
+            <p:ph type="dt" idx="1"/>
+          </p:nvPr>
+        </p:nvSpPr>
+        <p:spPr>
+          <a:xfrm>
+            <a:off x="3884613" y="0"/>
+            <a:ext cx="2971800" cy="458788"/>
+          </a:xfrm>
+          <a:prstGeom prst="rect">
+            <a:avLst/>
+          </a:prstGeom>
+        </p:spPr>
+        <p:txBody>
+          <a:bodyPr vert="horz" lIns="91440" tIns="45720" rIns="91440" bIns="45720" rtlCol="0"/>
+          <a:lstStyle>
+            <a:lvl1pPr algn="r">
+              <a:defRPr sz="1200"/>
+            </a:lvl1pPr>
+          </a:lstStyle>
+          <a:p>
+            <a:fld id="{1F67FFD2-E2D4-4F98-9A69-07E08884820F}" type="datetimeFigureOut">
+              <a:rPr lang="en-IN" smtClean="0"/>
+              <a:t>21-04-2026</a:t>
+            </a:fld>
+            <a:endParaRPr lang="en-IN"/>
+          </a:p>
+        </p:txBody>
+      </p:sp>
+      <p:sp>
+        <p:nvSpPr>
+          <p:cNvPr id="4" name="Slide Image Placeholder 3"/>
+          <p:cNvSpPr>
+            <a:spLocks noGrp="1" noRot="1" noChangeAspect="1"/>
+          </p:cNvSpPr>
+          <p:nvPr>
+            <p:ph type="sldImg" idx="2"/>
+          </p:nvPr>
+        </p:nvSpPr>
+        <p:spPr>
+          <a:xfrm>
+            <a:off x="685800" y="1143000"/>
+            <a:ext cx="5486400" cy="3086100"/>
+          </a:xfrm>
+          <a:prstGeom prst="rect">
+            <a:avLst/>
+          </a:prstGeom>
+          <a:noFill/>
+          <a:ln w="12700">
+            <a:solidFill>
+              <a:prstClr val="black"/>
+            </a:solidFill>
+          </a:ln>
+        </p:spPr>
+        <p:txBody>
+          <a:bodyPr vert="horz" lIns="91440" tIns="45720" rIns="91440" bIns="45720" rtlCol="0" anchor="ctr"/>
+          <a:lstStyle/>
+          <a:p>
+            <a:endParaRPr lang="en-IN"/>
+          </a:p>
+        </p:txBody>
+      </p:sp>
+      <p:sp>
+        <p:nvSpPr>
+          <p:cNvPr id="5" name="Notes Placeholder 4"/>
+          <p:cNvSpPr>
+            <a:spLocks noGrp="1"/>
+          </p:cNvSpPr>
+          <p:nvPr>
+            <p:ph type="body" sz="quarter" idx="3"/>
+          </p:nvPr>
+        </p:nvSpPr>
+        <p:spPr>
+          <a:xfrm>
+            <a:off x="685800" y="4400550"/>
+            <a:ext cx="5486400" cy="3600450"/>
+          </a:xfrm>
+          <a:prstGeom prst="rect">
+            <a:avLst/>
+          </a:prstGeom>
+        </p:spPr>
+        <p:txBody>
+          <a:bodyPr vert="horz" lIns="91440" tIns="45720" rIns="91440" bIns="45720" rtlCol="0"/>
+          <a:lstStyle/>
+          <a:p>
+            <a:pPr lvl="0"/>
+            <a:r>
+              <a:rPr lang="en-US"/>
+              <a:t>Click to edit Master text styles</a:t>
+            </a:r>
+          </a:p>
+          <a:p>
+            <a:pPr lvl="1"/>
+            <a:r>
+              <a:rPr lang="en-US"/>
+              <a:t>Second level</a:t>
+            </a:r>
+          </a:p>
+          <a:p>
+            <a:pPr lvl="2"/>
+            <a:r>
+              <a:rPr lang="en-US"/>
+              <a:t>Third level</a:t>
+            </a:r>
+          </a:p>
+          <a:p>
+            <a:pPr lvl="3"/>
+            <a:r>
+              <a:rPr lang="en-US"/>
+              <a:t>Fourth level</a:t>
+            </a:r>
+          </a:p>
+          <a:p>
+            <a:pPr lvl="4"/>
+            <a:r>
+              <a:rPr lang="en-US"/>
+              <a:t>Fifth level</a:t>
+            </a:r>
+            <a:endParaRPr lang="en-IN"/>
+          </a:p>
+        </p:txBody>
+      </p:sp>
+      <p:sp>
+        <p:nvSpPr>
+          <p:cNvPr id="6" name="Footer Placeholder 5"/>
+          <p:cNvSpPr>
+            <a:spLocks noGrp="1"/>
+          </p:cNvSpPr>
+          <p:nvPr>
+            <p:ph type="ftr" sz="quarter" idx="4"/>
+          </p:nvPr>
+        </p:nvSpPr>
+        <p:spPr>
+          <a:xfrm>
+            <a:off x="0" y="8685213"/>
+            <a:ext cx="2971800" cy="458787"/>
+          </a:xfrm>
+          <a:prstGeom prst="rect">
+            <a:avLst/>
+          </a:prstGeom>
+        </p:spPr>
+        <p:txBody>
+          <a:bodyPr vert="horz" lIns="91440" tIns="45720" rIns="91440" bIns="45720" rtlCol="0" anchor="b"/>
+          <a:lstStyle>
+            <a:lvl1pPr algn="l">
+              <a:defRPr sz="1200"/>
+            </a:lvl1pPr>
+          </a:lstStyle>
+          <a:p>
+            <a:endParaRPr lang="en-IN"/>
+          </a:p>
+        </p:txBody>
+      </p:sp>
+      <p:sp>
+        <p:nvSpPr>
+          <p:cNvPr id="7" name="Slide Number Placeholder 6"/>
+          <p:cNvSpPr>
+            <a:spLocks noGrp="1"/>
+          </p:cNvSpPr>
+          <p:nvPr>
+            <p:ph type="sldNum" sz="quarter" idx="5"/>
+          </p:nvPr>
+        </p:nvSpPr>
+        <p:spPr>
+          <a:xfrm>
+            <a:off x="3884613" y="8685213"/>
+            <a:ext cx="2971800" cy="458787"/>
+          </a:xfrm>
+          <a:prstGeom prst="rect">
+            <a:avLst/>
+          </a:prstGeom>
+        </p:spPr>
+        <p:txBody>
+          <a:bodyPr vert="horz" lIns="91440" tIns="45720" rIns="91440" bIns="45720" rtlCol="0" anchor="b"/>
+          <a:lstStyle>
+            <a:lvl1pPr algn="r">
+              <a:defRPr sz="1200"/>
+            </a:lvl1pPr>
+          </a:lstStyle>
+          <a:p>
+            <a:fld id="{0E78B68D-8F93-453B-AD3A-0979D582DAE5}" type="slidenum">
+              <a:rPr lang="en-IN" smtClean="0"/>
+              <a:t>‹#›</a:t>
+            </a:fld>
+            <a:endParaRPr lang="en-IN"/>
+          </a:p>
+        </p:txBody>
+      </p:sp>
+    </p:spTree>
+    <p:extLst>
+      <p:ext uri="{BB962C8B-B14F-4D97-AF65-F5344CB8AC3E}">
+        <p14:creationId xmlns:p14="http://schemas.microsoft.com/office/powerpoint/2010/main" val="628958149"/>
+      </p:ext>
+    </p:extLst>
+  </p:cSld>
+  <p:clrMap bg1="lt1" tx1="dk1" bg2="lt2" tx2="dk2" accent1="accent1" accent2="accent2" accent3="accent3" accent4="accent4" accent5="accent5" accent6="accent6" hlink="hlink" folHlink="folHlink"/>
+  <p:notesStyle>
+    <a:lvl1pPr marL="0" algn="l" defTabSz="914400" rtl="0" eaLnBrk="1" latinLnBrk="0" hangingPunct="1">
+      <a:defRPr sz="1200" kern="1200">
+        <a:solidFill>
+          <a:schemeClr val="tx1"/>
+        </a:solidFill>
+        <a:latin typeface="+mn-lt"/>
+        <a:ea typeface="+mn-ea"/>
+        <a:cs typeface="+mn-cs"/>
+      </a:defRPr>
+    </a:lvl1pPr>
+    <a:lvl2pPr marL="457200" algn="l" defTabSz="914400" rtl="0" eaLnBrk="1" latinLnBrk="0" hangingPunct="1">
+      <a:defRPr sz="1200" kern="1200">
+        <a:solidFill>
+          <a:schemeClr val="tx1"/>
+        </a:solidFill>
+        <a:latin typeface="+mn-lt"/>
+        <a:ea typeface="+mn-ea"/>
+        <a:cs typeface="+mn-cs"/>
+      </a:defRPr>
+    </a:lvl2pPr>
+    <a:lvl3pPr marL="914400" algn="l" defTabSz="914400" rtl="0" eaLnBrk="1" latinLnBrk="0" hangingPunct="1">
+      <a:defRPr sz="1200" kern="1200">
+        <a:solidFill>
+          <a:schemeClr val="tx1"/>
+        </a:solidFill>
+        <a:latin typeface="+mn-lt"/>
+        <a:ea typeface="+mn-ea"/>
+        <a:cs typeface="+mn-cs"/>
+      </a:defRPr>
+    </a:lvl3pPr>
+    <a:lvl4pPr marL="1371600" algn="l" defTabSz="914400" rtl="0" eaLnBrk="1" latinLnBrk="0" hangingPunct="1">
+      <a:defRPr sz="1200" kern="1200">
+        <a:solidFill>
+          <a:schemeClr val="tx1"/>
+        </a:solidFill>
+        <a:latin typeface="+mn-lt"/>
+        <a:ea typeface="+mn-ea"/>
+        <a:cs typeface="+mn-cs"/>
+      </a:defRPr>
+    </a:lvl4pPr>
+    <a:lvl5pPr marL="1828800" algn="l" defTabSz="914400" rtl="0" eaLnBrk="1" latinLnBrk="0" hangingPunct="1">
+      <a:defRPr sz="1200" kern="1200">
+        <a:solidFill>
+          <a:schemeClr val="tx1"/>
+        </a:solidFill>
+        <a:latin typeface="+mn-lt"/>
+        <a:ea typeface="+mn-ea"/>
+        <a:cs typeface="+mn-cs"/>
+      </a:defRPr>
+    </a:lvl5pPr>
+    <a:lvl6pPr marL="2286000" algn="l" defTabSz="914400" rtl="0" eaLnBrk="1" latinLnBrk="0" hangingPunct="1">
+      <a:defRPr sz="1200" kern="1200">
+        <a:solidFill>
+          <a:schemeClr val="tx1"/>
+        </a:solidFill>
+        <a:latin typeface="+mn-lt"/>
+        <a:ea typeface="+mn-ea"/>
+        <a:cs typeface="+mn-cs"/>
+      </a:defRPr>
+    </a:lvl6pPr>
+    <a:lvl7pPr marL="2743200" algn="l" defTabSz="914400" rtl="0" eaLnBrk="1" latinLnBrk="0" hangingPunct="1">
+      <a:defRPr sz="1200" kern="1200">
+        <a:solidFill>
+          <a:schemeClr val="tx1"/>
+        </a:solidFill>
+        <a:latin typeface="+mn-lt"/>
+        <a:ea typeface="+mn-ea"/>
+        <a:cs typeface="+mn-cs"/>
+      </a:defRPr>
+    </a:lvl7pPr>
+    <a:lvl8pPr marL="3200400" algn="l" defTabSz="914400" rtl="0" eaLnBrk="1" latinLnBrk="0" hangingPunct="1">
+      <a:defRPr sz="1200" kern="1200">
+        <a:solidFill>
+          <a:schemeClr val="tx1"/>
+        </a:solidFill>
+        <a:latin typeface="+mn-lt"/>
+        <a:ea typeface="+mn-ea"/>
+        <a:cs typeface="+mn-cs"/>
+      </a:defRPr>
+    </a:lvl8pPr>
+    <a:lvl9pPr marL="3657600" algn="l" defTabSz="914400" rtl="0" eaLnBrk="1" latinLnBrk="0" hangingPunct="1">
+      <a:defRPr sz="1200" kern="1200">
+        <a:solidFill>
+          <a:schemeClr val="tx1"/>
+        </a:solidFill>
+        <a:latin typeface="+mn-lt"/>
+        <a:ea typeface="+mn-ea"/>
+        <a:cs typeface="+mn-cs"/>
+      </a:defRPr>
+    </a:lvl9pPr>
+  </p:notesStyle>
+</p:notesMaster>
+</file>
+
+<file path=ppt/notesSlides/notesSlide1.xml><?xml version="1.0" encoding="utf-8"?>
+<p:notes xmlns:a="http://schemas.openxmlformats.org/drawingml/2006/main" xmlns:r="http://schemas.openxmlformats.org/officeDocument/2006/relationships" xmlns:p="http://schemas.openxmlformats.org/presentationml/2006/main">
+  <p:cSld>
+    <p:spTree>
+      <p:nvGrpSpPr>
+        <p:cNvPr id="1" name=""/>
+        <p:cNvGrpSpPr/>
+        <p:nvPr/>
+      </p:nvGrpSpPr>
+      <p:grpSpPr>
+        <a:xfrm>
+          <a:off x="0" y="0"/>
+          <a:ext cx="0" cy="0"/>
+          <a:chOff x="0" y="0"/>
+          <a:chExt cx="0" cy="0"/>
+        </a:xfrm>
+      </p:grpSpPr>
+      <p:sp>
+        <p:nvSpPr>
+          <p:cNvPr id="2" name="Slide Image Placeholder 1"/>
+          <p:cNvSpPr>
+            <a:spLocks noGrp="1" noRot="1" noChangeAspect="1"/>
+          </p:cNvSpPr>
+          <p:nvPr>
+            <p:ph type="sldImg"/>
+          </p:nvPr>
+        </p:nvSpPr>
+        <p:spPr/>
+      </p:sp>
+      <p:sp>
+        <p:nvSpPr>
+          <p:cNvPr id="3" name="Notes Placeholder 2"/>
+          <p:cNvSpPr>
+            <a:spLocks noGrp="1"/>
+          </p:cNvSpPr>
+          <p:nvPr>
+            <p:ph type="body" idx="1"/>
+          </p:nvPr>
+        </p:nvSpPr>
+        <p:spPr/>
+        <p:txBody>
+          <a:bodyPr/>
+          <a:lstStyle/>
+          <a:p>
+            <a:endParaRPr lang="en-IN" dirty="0"/>
+          </a:p>
+        </p:txBody>
+      </p:sp>
+      <p:sp>
+        <p:nvSpPr>
+          <p:cNvPr id="4" name="Slide Number Placeholder 3"/>
+          <p:cNvSpPr>
+            <a:spLocks noGrp="1"/>
+          </p:cNvSpPr>
+          <p:nvPr>
+            <p:ph type="sldNum" sz="quarter" idx="5"/>
+          </p:nvPr>
+        </p:nvSpPr>
+        <p:spPr/>
+        <p:txBody>
+          <a:bodyPr/>
+          <a:lstStyle/>
+          <a:p>
+            <a:fld id="{0E78B68D-8F93-453B-AD3A-0979D582DAE5}" type="slidenum">
+              <a:rPr lang="en-IN" smtClean="0"/>
+              <a:t>1</a:t>
+            </a:fld>
+            <a:endParaRPr lang="en-IN"/>
+          </a:p>
+        </p:txBody>
+      </p:sp>
+    </p:spTree>
+    <p:extLst>
+      <p:ext uri="{BB962C8B-B14F-4D97-AF65-F5344CB8AC3E}">
+        <p14:creationId xmlns:p14="http://schemas.microsoft.com/office/powerpoint/2010/main" val="60412330"/>
+      </p:ext>
+    </p:extLst>
+  </p:cSld>
+  <p:clrMapOvr>
+    <a:masterClrMapping/>
+  </p:clrMapOvr>
+</p:notes>
+</file>
+
+<file path=ppt/notesSlides/notesSlide2.xml><?xml version="1.0" encoding="utf-8"?>
+<p:notes xmlns:a="http://schemas.openxmlformats.org/drawingml/2006/main" xmlns:r="http://schemas.openxmlformats.org/officeDocument/2006/relationships" xmlns:p="http://schemas.openxmlformats.org/presentationml/2006/main">
+  <p:cSld>
+    <p:spTree>
+      <p:nvGrpSpPr>
+        <p:cNvPr id="1" name=""/>
+        <p:cNvGrpSpPr/>
+        <p:nvPr/>
+      </p:nvGrpSpPr>
+      <p:grpSpPr>
+        <a:xfrm>
+          <a:off x="0" y="0"/>
+          <a:ext cx="0" cy="0"/>
+          <a:chOff x="0" y="0"/>
+          <a:chExt cx="0" cy="0"/>
+        </a:xfrm>
+      </p:grpSpPr>
+      <p:sp>
+        <p:nvSpPr>
+          <p:cNvPr id="2" name="Slide Image Placeholder 1"/>
+          <p:cNvSpPr>
+            <a:spLocks noGrp="1" noRot="1" noChangeAspect="1"/>
+          </p:cNvSpPr>
+          <p:nvPr>
+            <p:ph type="sldImg"/>
+          </p:nvPr>
+        </p:nvSpPr>
+        <p:spPr/>
+      </p:sp>
+      <p:sp>
+        <p:nvSpPr>
+          <p:cNvPr id="3" name="Notes Placeholder 2"/>
+          <p:cNvSpPr>
+            <a:spLocks noGrp="1"/>
+          </p:cNvSpPr>
+          <p:nvPr>
+            <p:ph type="body" idx="1"/>
+          </p:nvPr>
+        </p:nvSpPr>
+        <p:spPr/>
+        <p:txBody>
+          <a:bodyPr/>
+          <a:lstStyle/>
+          <a:p>
+            <a:endParaRPr lang="en-IN" dirty="0"/>
+          </a:p>
+        </p:txBody>
+      </p:sp>
+      <p:sp>
+        <p:nvSpPr>
+          <p:cNvPr id="4" name="Slide Number Placeholder 3"/>
+          <p:cNvSpPr>
+            <a:spLocks noGrp="1"/>
+          </p:cNvSpPr>
+          <p:nvPr>
+            <p:ph type="sldNum" sz="quarter" idx="5"/>
+          </p:nvPr>
+        </p:nvSpPr>
+        <p:spPr/>
+        <p:txBody>
+          <a:bodyPr/>
+          <a:lstStyle/>
+          <a:p>
+            <a:fld id="{0E78B68D-8F93-453B-AD3A-0979D582DAE5}" type="slidenum">
+              <a:rPr lang="en-IN" smtClean="0"/>
+              <a:t>9</a:t>
+            </a:fld>
+            <a:endParaRPr lang="en-IN"/>
+          </a:p>
+        </p:txBody>
+      </p:sp>
+    </p:spTree>
+    <p:extLst>
+      <p:ext uri="{BB962C8B-B14F-4D97-AF65-F5344CB8AC3E}">
+        <p14:creationId xmlns:p14="http://schemas.microsoft.com/office/powerpoint/2010/main" val="682699307"/>
+      </p:ext>
+    </p:extLst>
+  </p:cSld>
+  <p:clrMapOvr>
+    <a:masterClrMapping/>
+  </p:clrMapOvr>
+</p:notes>
 </file>
 
 <file path=ppt/slideLayouts/slideLayout1.xml><?xml version="1.0" encoding="utf-8"?>
@@ -160,10 +697,9 @@
           <a:lstStyle/>
           <a:p>
             <a:r>
-              <a:rPr lang="en-US" smtClean="0"/>
+              <a:rPr lang="en-US"/>
               <a:t>Click to edit Master title style</a:t>
             </a:r>
-            <a:endParaRPr lang="en-US"/>
           </a:p>
         </p:txBody>
       </p:sp>
@@ -279,10 +815,9 @@
           </a:lstStyle>
           <a:p>
             <a:r>
-              <a:rPr lang="en-US" smtClean="0"/>
+              <a:rPr lang="en-US"/>
               <a:t>Click to edit Master subtitle style</a:t>
             </a:r>
-            <a:endParaRPr lang="en-US"/>
           </a:p>
         </p:txBody>
       </p:sp>
@@ -303,7 +838,7 @@
           <a:p>
             <a:fld id="{5BCAD085-E8A6-8845-BD4E-CB4CCA059FC4}" type="datetimeFigureOut">
               <a:rPr lang="en-US" smtClean="0"/>
-              <a:t>1/27/13</a:t>
+              <a:t>4/21/2026</a:t>
             </a:fld>
             <a:endParaRPr lang="en-US"/>
           </a:p>
@@ -397,10 +932,9 @@
           <a:lstStyle/>
           <a:p>
             <a:r>
-              <a:rPr lang="en-US" smtClean="0"/>
+              <a:rPr lang="en-US"/>
               <a:t>Click to edit Master title style</a:t>
             </a:r>
-            <a:endParaRPr lang="en-US"/>
           </a:p>
         </p:txBody>
       </p:sp>
@@ -421,38 +955,37 @@
           <a:p>
             <a:pPr lvl="0"/>
             <a:r>
-              <a:rPr lang="en-US" smtClean="0"/>
+              <a:rPr lang="en-US"/>
               <a:t>Click to edit Master text styles</a:t>
             </a:r>
           </a:p>
           <a:p>
             <a:pPr lvl="1"/>
             <a:r>
-              <a:rPr lang="en-US" smtClean="0"/>
+              <a:rPr lang="en-US"/>
               <a:t>Second level</a:t>
             </a:r>
           </a:p>
           <a:p>
             <a:pPr lvl="2"/>
             <a:r>
-              <a:rPr lang="en-US" smtClean="0"/>
+              <a:rPr lang="en-US"/>
               <a:t>Third level</a:t>
             </a:r>
           </a:p>
           <a:p>
             <a:pPr lvl="3"/>
             <a:r>
-              <a:rPr lang="en-US" smtClean="0"/>
+              <a:rPr lang="en-US"/>
               <a:t>Fourth level</a:t>
             </a:r>
           </a:p>
           <a:p>
             <a:pPr lvl="4"/>
             <a:r>
-              <a:rPr lang="en-US" smtClean="0"/>
+              <a:rPr lang="en-US"/>
               <a:t>Fifth level</a:t>
             </a:r>
-            <a:endParaRPr lang="en-US"/>
           </a:p>
         </p:txBody>
       </p:sp>
@@ -473,7 +1006,7 @@
           <a:p>
             <a:fld id="{5BCAD085-E8A6-8845-BD4E-CB4CCA059FC4}" type="datetimeFigureOut">
               <a:rPr lang="en-US" smtClean="0"/>
-              <a:t>1/27/13</a:t>
+              <a:t>4/21/2026</a:t>
             </a:fld>
             <a:endParaRPr lang="en-US"/>
           </a:p>
@@ -572,10 +1105,9 @@
           <a:lstStyle/>
           <a:p>
             <a:r>
-              <a:rPr lang="en-US" smtClean="0"/>
+              <a:rPr lang="en-US"/>
               <a:t>Click to edit Master title style</a:t>
             </a:r>
-            <a:endParaRPr lang="en-US"/>
           </a:p>
         </p:txBody>
       </p:sp>
@@ -601,38 +1133,37 @@
           <a:p>
             <a:pPr lvl="0"/>
             <a:r>
-              <a:rPr lang="en-US" smtClean="0"/>
+              <a:rPr lang="en-US"/>
               <a:t>Click to edit Master text styles</a:t>
             </a:r>
           </a:p>
           <a:p>
             <a:pPr lvl="1"/>
             <a:r>
-              <a:rPr lang="en-US" smtClean="0"/>
+              <a:rPr lang="en-US"/>
               <a:t>Second level</a:t>
             </a:r>
           </a:p>
           <a:p>
             <a:pPr lvl="2"/>
             <a:r>
-              <a:rPr lang="en-US" smtClean="0"/>
+              <a:rPr lang="en-US"/>
               <a:t>Third level</a:t>
             </a:r>
           </a:p>
           <a:p>
             <a:pPr lvl="3"/>
             <a:r>
-              <a:rPr lang="en-US" smtClean="0"/>
+              <a:rPr lang="en-US"/>
               <a:t>Fourth level</a:t>
             </a:r>
           </a:p>
           <a:p>
             <a:pPr lvl="4"/>
             <a:r>
-              <a:rPr lang="en-US" smtClean="0"/>
+              <a:rPr lang="en-US"/>
               <a:t>Fifth level</a:t>
             </a:r>
-            <a:endParaRPr lang="en-US"/>
           </a:p>
         </p:txBody>
       </p:sp>
@@ -653,7 +1184,7 @@
           <a:p>
             <a:fld id="{5BCAD085-E8A6-8845-BD4E-CB4CCA059FC4}" type="datetimeFigureOut">
               <a:rPr lang="en-US" smtClean="0"/>
-              <a:t>1/27/13</a:t>
+              <a:t>4/21/2026</a:t>
             </a:fld>
             <a:endParaRPr lang="en-US"/>
           </a:p>
@@ -747,10 +1278,9 @@
           <a:lstStyle/>
           <a:p>
             <a:r>
-              <a:rPr lang="en-US" smtClean="0"/>
+              <a:rPr lang="en-US"/>
               <a:t>Click to edit Master title style</a:t>
             </a:r>
-            <a:endParaRPr lang="en-US"/>
           </a:p>
         </p:txBody>
       </p:sp>
@@ -771,38 +1301,37 @@
           <a:p>
             <a:pPr lvl="0"/>
             <a:r>
-              <a:rPr lang="en-US" smtClean="0"/>
+              <a:rPr lang="en-US"/>
               <a:t>Click to edit Master text styles</a:t>
             </a:r>
           </a:p>
           <a:p>
             <a:pPr lvl="1"/>
             <a:r>
-              <a:rPr lang="en-US" smtClean="0"/>
+              <a:rPr lang="en-US"/>
               <a:t>Second level</a:t>
             </a:r>
           </a:p>
           <a:p>
             <a:pPr lvl="2"/>
             <a:r>
-              <a:rPr lang="en-US" smtClean="0"/>
+              <a:rPr lang="en-US"/>
               <a:t>Third level</a:t>
             </a:r>
           </a:p>
           <a:p>
             <a:pPr lvl="3"/>
             <a:r>
-              <a:rPr lang="en-US" smtClean="0"/>
+              <a:rPr lang="en-US"/>
               <a:t>Fourth level</a:t>
             </a:r>
           </a:p>
           <a:p>
             <a:pPr lvl="4"/>
             <a:r>
-              <a:rPr lang="en-US" smtClean="0"/>
+              <a:rPr lang="en-US"/>
               <a:t>Fifth level</a:t>
             </a:r>
-            <a:endParaRPr lang="en-US"/>
           </a:p>
         </p:txBody>
       </p:sp>
@@ -823,7 +1352,7 @@
           <a:p>
             <a:fld id="{5BCAD085-E8A6-8845-BD4E-CB4CCA059FC4}" type="datetimeFigureOut">
               <a:rPr lang="en-US" smtClean="0"/>
-              <a:t>1/27/13</a:t>
+              <a:t>4/21/2026</a:t>
             </a:fld>
             <a:endParaRPr lang="en-US"/>
           </a:p>
@@ -926,10 +1455,9 @@
           </a:lstStyle>
           <a:p>
             <a:r>
-              <a:rPr lang="en-US" smtClean="0"/>
+              <a:rPr lang="en-US"/>
               <a:t>Click to edit Master title style</a:t>
             </a:r>
-            <a:endParaRPr lang="en-US"/>
           </a:p>
         </p:txBody>
       </p:sp>
@@ -1046,7 +1574,7 @@
           <a:p>
             <a:pPr lvl="0"/>
             <a:r>
-              <a:rPr lang="en-US" smtClean="0"/>
+              <a:rPr lang="en-US"/>
               <a:t>Click to edit Master text styles</a:t>
             </a:r>
           </a:p>
@@ -1069,7 +1597,7 @@
           <a:p>
             <a:fld id="{5BCAD085-E8A6-8845-BD4E-CB4CCA059FC4}" type="datetimeFigureOut">
               <a:rPr lang="en-US" smtClean="0"/>
-              <a:t>1/27/13</a:t>
+              <a:t>4/21/2026</a:t>
             </a:fld>
             <a:endParaRPr lang="en-US"/>
           </a:p>
@@ -1163,10 +1691,9 @@
           <a:lstStyle/>
           <a:p>
             <a:r>
-              <a:rPr lang="en-US" smtClean="0"/>
+              <a:rPr lang="en-US"/>
               <a:t>Click to edit Master title style</a:t>
             </a:r>
-            <a:endParaRPr lang="en-US"/>
           </a:p>
         </p:txBody>
       </p:sp>
@@ -1220,38 +1747,37 @@
           <a:p>
             <a:pPr lvl="0"/>
             <a:r>
-              <a:rPr lang="en-US" smtClean="0"/>
+              <a:rPr lang="en-US"/>
               <a:t>Click to edit Master text styles</a:t>
             </a:r>
           </a:p>
           <a:p>
             <a:pPr lvl="1"/>
             <a:r>
-              <a:rPr lang="en-US" smtClean="0"/>
+              <a:rPr lang="en-US"/>
               <a:t>Second level</a:t>
             </a:r>
           </a:p>
           <a:p>
             <a:pPr lvl="2"/>
             <a:r>
-              <a:rPr lang="en-US" smtClean="0"/>
+              <a:rPr lang="en-US"/>
               <a:t>Third level</a:t>
             </a:r>
           </a:p>
           <a:p>
             <a:pPr lvl="3"/>
             <a:r>
-              <a:rPr lang="en-US" smtClean="0"/>
+              <a:rPr lang="en-US"/>
               <a:t>Fourth level</a:t>
             </a:r>
           </a:p>
           <a:p>
             <a:pPr lvl="4"/>
             <a:r>
-              <a:rPr lang="en-US" smtClean="0"/>
+              <a:rPr lang="en-US"/>
               <a:t>Fifth level</a:t>
             </a:r>
-            <a:endParaRPr lang="en-US"/>
           </a:p>
         </p:txBody>
       </p:sp>
@@ -1305,38 +1831,37 @@
           <a:p>
             <a:pPr lvl="0"/>
             <a:r>
-              <a:rPr lang="en-US" smtClean="0"/>
+              <a:rPr lang="en-US"/>
               <a:t>Click to edit Master text styles</a:t>
             </a:r>
           </a:p>
           <a:p>
             <a:pPr lvl="1"/>
             <a:r>
-              <a:rPr lang="en-US" smtClean="0"/>
+              <a:rPr lang="en-US"/>
               <a:t>Second level</a:t>
             </a:r>
           </a:p>
           <a:p>
             <a:pPr lvl="2"/>
             <a:r>
-              <a:rPr lang="en-US" smtClean="0"/>
+              <a:rPr lang="en-US"/>
               <a:t>Third level</a:t>
             </a:r>
           </a:p>
           <a:p>
             <a:pPr lvl="3"/>
             <a:r>
-              <a:rPr lang="en-US" smtClean="0"/>
+              <a:rPr lang="en-US"/>
               <a:t>Fourth level</a:t>
             </a:r>
           </a:p>
           <a:p>
             <a:pPr lvl="4"/>
             <a:r>
-              <a:rPr lang="en-US" smtClean="0"/>
+              <a:rPr lang="en-US"/>
               <a:t>Fifth level</a:t>
             </a:r>
-            <a:endParaRPr lang="en-US"/>
           </a:p>
         </p:txBody>
       </p:sp>
@@ -1357,7 +1882,7 @@
           <a:p>
             <a:fld id="{5BCAD085-E8A6-8845-BD4E-CB4CCA059FC4}" type="datetimeFigureOut">
               <a:rPr lang="en-US" smtClean="0"/>
-              <a:t>1/27/13</a:t>
+              <a:t>4/21/2026</a:t>
             </a:fld>
             <a:endParaRPr lang="en-US"/>
           </a:p>
@@ -1455,10 +1980,9 @@
           </a:lstStyle>
           <a:p>
             <a:r>
-              <a:rPr lang="en-US" smtClean="0"/>
+              <a:rPr lang="en-US"/>
               <a:t>Click to edit Master title style</a:t>
             </a:r>
-            <a:endParaRPr lang="en-US"/>
           </a:p>
         </p:txBody>
       </p:sp>
@@ -1521,7 +2045,7 @@
           <a:p>
             <a:pPr lvl="0"/>
             <a:r>
-              <a:rPr lang="en-US" smtClean="0"/>
+              <a:rPr lang="en-US"/>
               <a:t>Click to edit Master text styles</a:t>
             </a:r>
           </a:p>
@@ -1577,38 +2101,37 @@
           <a:p>
             <a:pPr lvl="0"/>
             <a:r>
-              <a:rPr lang="en-US" smtClean="0"/>
+              <a:rPr lang="en-US"/>
               <a:t>Click to edit Master text styles</a:t>
             </a:r>
           </a:p>
           <a:p>
             <a:pPr lvl="1"/>
             <a:r>
-              <a:rPr lang="en-US" smtClean="0"/>
+              <a:rPr lang="en-US"/>
               <a:t>Second level</a:t>
             </a:r>
           </a:p>
           <a:p>
             <a:pPr lvl="2"/>
             <a:r>
-              <a:rPr lang="en-US" smtClean="0"/>
+              <a:rPr lang="en-US"/>
               <a:t>Third level</a:t>
             </a:r>
           </a:p>
           <a:p>
             <a:pPr lvl="3"/>
             <a:r>
-              <a:rPr lang="en-US" smtClean="0"/>
+              <a:rPr lang="en-US"/>
               <a:t>Fourth level</a:t>
             </a:r>
           </a:p>
           <a:p>
             <a:pPr lvl="4"/>
             <a:r>
-              <a:rPr lang="en-US" smtClean="0"/>
+              <a:rPr lang="en-US"/>
               <a:t>Fifth level</a:t>
             </a:r>
-            <a:endParaRPr lang="en-US"/>
           </a:p>
         </p:txBody>
       </p:sp>
@@ -1671,7 +2194,7 @@
           <a:p>
             <a:pPr lvl="0"/>
             <a:r>
-              <a:rPr lang="en-US" smtClean="0"/>
+              <a:rPr lang="en-US"/>
               <a:t>Click to edit Master text styles</a:t>
             </a:r>
           </a:p>
@@ -1727,38 +2250,37 @@
           <a:p>
             <a:pPr lvl="0"/>
             <a:r>
-              <a:rPr lang="en-US" smtClean="0"/>
+              <a:rPr lang="en-US"/>
               <a:t>Click to edit Master text styles</a:t>
             </a:r>
           </a:p>
           <a:p>
             <a:pPr lvl="1"/>
             <a:r>
-              <a:rPr lang="en-US" smtClean="0"/>
+              <a:rPr lang="en-US"/>
               <a:t>Second level</a:t>
             </a:r>
           </a:p>
           <a:p>
             <a:pPr lvl="2"/>
             <a:r>
-              <a:rPr lang="en-US" smtClean="0"/>
+              <a:rPr lang="en-US"/>
               <a:t>Third level</a:t>
             </a:r>
           </a:p>
           <a:p>
             <a:pPr lvl="3"/>
             <a:r>
-              <a:rPr lang="en-US" smtClean="0"/>
+              <a:rPr lang="en-US"/>
               <a:t>Fourth level</a:t>
             </a:r>
           </a:p>
           <a:p>
             <a:pPr lvl="4"/>
             <a:r>
-              <a:rPr lang="en-US" smtClean="0"/>
+              <a:rPr lang="en-US"/>
               <a:t>Fifth level</a:t>
             </a:r>
-            <a:endParaRPr lang="en-US"/>
           </a:p>
         </p:txBody>
       </p:sp>
@@ -1779,7 +2301,7 @@
           <a:p>
             <a:fld id="{5BCAD085-E8A6-8845-BD4E-CB4CCA059FC4}" type="datetimeFigureOut">
               <a:rPr lang="en-US" smtClean="0"/>
-              <a:t>1/27/13</a:t>
+              <a:t>4/21/2026</a:t>
             </a:fld>
             <a:endParaRPr lang="en-US"/>
           </a:p>
@@ -1873,10 +2395,9 @@
           <a:lstStyle/>
           <a:p>
             <a:r>
-              <a:rPr lang="en-US" smtClean="0"/>
+              <a:rPr lang="en-US"/>
               <a:t>Click to edit Master title style</a:t>
             </a:r>
-            <a:endParaRPr lang="en-US"/>
           </a:p>
         </p:txBody>
       </p:sp>
@@ -1897,7 +2418,7 @@
           <a:p>
             <a:fld id="{5BCAD085-E8A6-8845-BD4E-CB4CCA059FC4}" type="datetimeFigureOut">
               <a:rPr lang="en-US" smtClean="0"/>
-              <a:t>1/27/13</a:t>
+              <a:t>4/21/2026</a:t>
             </a:fld>
             <a:endParaRPr lang="en-US"/>
           </a:p>
@@ -1992,7 +2513,7 @@
           <a:p>
             <a:fld id="{5BCAD085-E8A6-8845-BD4E-CB4CCA059FC4}" type="datetimeFigureOut">
               <a:rPr lang="en-US" smtClean="0"/>
-              <a:t>1/27/13</a:t>
+              <a:t>4/21/2026</a:t>
             </a:fld>
             <a:endParaRPr lang="en-US"/>
           </a:p>
@@ -2095,10 +2616,9 @@
           </a:lstStyle>
           <a:p>
             <a:r>
-              <a:rPr lang="en-US" smtClean="0"/>
+              <a:rPr lang="en-US"/>
               <a:t>Click to edit Master title style</a:t>
             </a:r>
-            <a:endParaRPr lang="en-US"/>
           </a:p>
         </p:txBody>
       </p:sp>
@@ -2152,38 +2672,37 @@
           <a:p>
             <a:pPr lvl="0"/>
             <a:r>
-              <a:rPr lang="en-US" smtClean="0"/>
+              <a:rPr lang="en-US"/>
               <a:t>Click to edit Master text styles</a:t>
             </a:r>
           </a:p>
           <a:p>
             <a:pPr lvl="1"/>
             <a:r>
-              <a:rPr lang="en-US" smtClean="0"/>
+              <a:rPr lang="en-US"/>
               <a:t>Second level</a:t>
             </a:r>
           </a:p>
           <a:p>
             <a:pPr lvl="2"/>
             <a:r>
-              <a:rPr lang="en-US" smtClean="0"/>
+              <a:rPr lang="en-US"/>
               <a:t>Third level</a:t>
             </a:r>
           </a:p>
           <a:p>
             <a:pPr lvl="3"/>
             <a:r>
-              <a:rPr lang="en-US" smtClean="0"/>
+              <a:rPr lang="en-US"/>
               <a:t>Fourth level</a:t>
             </a:r>
           </a:p>
           <a:p>
             <a:pPr lvl="4"/>
             <a:r>
-              <a:rPr lang="en-US" smtClean="0"/>
+              <a:rPr lang="en-US"/>
               <a:t>Fifth level</a:t>
             </a:r>
-            <a:endParaRPr lang="en-US"/>
           </a:p>
         </p:txBody>
       </p:sp>
@@ -2246,7 +2765,7 @@
           <a:p>
             <a:pPr lvl="0"/>
             <a:r>
-              <a:rPr lang="en-US" smtClean="0"/>
+              <a:rPr lang="en-US"/>
               <a:t>Click to edit Master text styles</a:t>
             </a:r>
           </a:p>
@@ -2269,7 +2788,7 @@
           <a:p>
             <a:fld id="{5BCAD085-E8A6-8845-BD4E-CB4CCA059FC4}" type="datetimeFigureOut">
               <a:rPr lang="en-US" smtClean="0"/>
-              <a:t>1/27/13</a:t>
+              <a:t>4/21/2026</a:t>
             </a:fld>
             <a:endParaRPr lang="en-US"/>
           </a:p>
@@ -2372,10 +2891,9 @@
           </a:lstStyle>
           <a:p>
             <a:r>
-              <a:rPr lang="en-US" smtClean="0"/>
+              <a:rPr lang="en-US"/>
               <a:t>Click to edit Master title style</a:t>
             </a:r>
-            <a:endParaRPr lang="en-US"/>
           </a:p>
         </p:txBody>
       </p:sp>
@@ -2499,7 +3017,7 @@
           <a:p>
             <a:pPr lvl="0"/>
             <a:r>
-              <a:rPr lang="en-US" smtClean="0"/>
+              <a:rPr lang="en-US"/>
               <a:t>Click to edit Master text styles</a:t>
             </a:r>
           </a:p>
@@ -2522,7 +3040,7 @@
           <a:p>
             <a:fld id="{5BCAD085-E8A6-8845-BD4E-CB4CCA059FC4}" type="datetimeFigureOut">
               <a:rPr lang="en-US" smtClean="0"/>
-              <a:t>1/27/13</a:t>
+              <a:t>4/21/2026</a:t>
             </a:fld>
             <a:endParaRPr lang="en-US"/>
           </a:p>
@@ -2631,10 +3149,9 @@
           <a:lstStyle/>
           <a:p>
             <a:r>
-              <a:rPr lang="en-US" smtClean="0"/>
+              <a:rPr lang="en-US"/>
               <a:t>Click to edit Master title style</a:t>
             </a:r>
-            <a:endParaRPr lang="en-US"/>
           </a:p>
         </p:txBody>
       </p:sp>
@@ -2665,38 +3182,37 @@
           <a:p>
             <a:pPr lvl="0"/>
             <a:r>
-              <a:rPr lang="en-US" smtClean="0"/>
+              <a:rPr lang="en-US"/>
               <a:t>Click to edit Master text styles</a:t>
             </a:r>
           </a:p>
           <a:p>
             <a:pPr lvl="1"/>
             <a:r>
-              <a:rPr lang="en-US" smtClean="0"/>
+              <a:rPr lang="en-US"/>
               <a:t>Second level</a:t>
             </a:r>
           </a:p>
           <a:p>
             <a:pPr lvl="2"/>
             <a:r>
-              <a:rPr lang="en-US" smtClean="0"/>
+              <a:rPr lang="en-US"/>
               <a:t>Third level</a:t>
             </a:r>
           </a:p>
           <a:p>
             <a:pPr lvl="3"/>
             <a:r>
-              <a:rPr lang="en-US" smtClean="0"/>
+              <a:rPr lang="en-US"/>
               <a:t>Fourth level</a:t>
             </a:r>
           </a:p>
           <a:p>
             <a:pPr lvl="4"/>
             <a:r>
-              <a:rPr lang="en-US" smtClean="0"/>
+              <a:rPr lang="en-US"/>
               <a:t>Fifth level</a:t>
             </a:r>
-            <a:endParaRPr lang="en-US"/>
           </a:p>
         </p:txBody>
       </p:sp>
@@ -2735,7 +3251,7 @@
           <a:p>
             <a:fld id="{5BCAD085-E8A6-8845-BD4E-CB4CCA059FC4}" type="datetimeFigureOut">
               <a:rPr lang="en-US" smtClean="0"/>
-              <a:t>1/27/13</a:t>
+              <a:t>4/21/2026</a:t>
             </a:fld>
             <a:endParaRPr lang="en-US"/>
           </a:p>
@@ -3094,7 +3610,7 @@
 </file>
 
 <file path=ppt/slides/slide1.xml><?xml version="1.0" encoding="utf-8"?>
-<p:sld xmlns:a="http://schemas.openxmlformats.org/drawingml/2006/main" xmlns:p="http://schemas.openxmlformats.org/presentationml/2006/main" xmlns:r="http://schemas.openxmlformats.org/officeDocument/2006/relationships">
+<p:sld xmlns:a="http://schemas.openxmlformats.org/drawingml/2006/main" xmlns:r="http://schemas.openxmlformats.org/officeDocument/2006/relationships" xmlns:p="http://schemas.openxmlformats.org/presentationml/2006/main">
   <p:cSld>
     <p:spTree>
       <p:nvGrpSpPr>
@@ -3102,7 +3618,14 @@
         <p:cNvGrpSpPr/>
         <p:nvPr/>
       </p:nvGrpSpPr>
-      <p:grpSpPr/>
+      <p:grpSpPr>
+        <a:xfrm>
+          <a:off x="0" y="0"/>
+          <a:ext cx="0" cy="0"/>
+          <a:chOff x="0" y="0"/>
+          <a:chExt cx="0" cy="0"/>
+        </a:xfrm>
+      </p:grpSpPr>
       <p:sp>
         <p:nvSpPr>
           <p:cNvPr id="2" name="Rectangle 1"/>
@@ -3143,6 +3666,7 @@
           <a:lstStyle/>
           <a:p>
             <a:pPr algn="ctr"/>
+            <a:endParaRPr/>
           </a:p>
         </p:txBody>
       </p:sp>
@@ -3186,6 +3710,7 @@
           <a:lstStyle/>
           <a:p>
             <a:pPr algn="ctr"/>
+            <a:endParaRPr/>
           </a:p>
         </p:txBody>
       </p:sp>
@@ -3229,6 +3754,7 @@
           <a:lstStyle/>
           <a:p>
             <a:pPr algn="ctr"/>
+            <a:endParaRPr/>
           </a:p>
         </p:txBody>
       </p:sp>
@@ -3272,6 +3798,7 @@
           <a:lstStyle/>
           <a:p>
             <a:pPr algn="ctr"/>
+            <a:endParaRPr/>
           </a:p>
         </p:txBody>
       </p:sp>
@@ -3315,6 +3842,7 @@
           <a:lstStyle/>
           <a:p>
             <a:pPr algn="ctr"/>
+            <a:endParaRPr/>
           </a:p>
         </p:txBody>
       </p:sp>
@@ -3494,6 +4022,7 @@
           <a:lstStyle/>
           <a:p>
             <a:pPr algn="ctr"/>
+            <a:endParaRPr/>
           </a:p>
         </p:txBody>
       </p:sp>
@@ -3506,33 +4035,49 @@
         <p:spPr>
           <a:xfrm>
             <a:off x="548640" y="3154680"/>
-            <a:ext cx="8229600" cy="1097280"/>
-          </a:xfrm>
-          <a:prstGeom prst="rect">
-            <a:avLst/>
-          </a:prstGeom>
-          <a:noFill/>
-        </p:spPr>
-        <p:txBody>
-          <a:bodyPr wrap="square">
-            <a:spAutoFit/>
-          </a:bodyPr>
-          <a:lstStyle/>
-          <a:p>
-            <a:pPr algn="l"/>
-            <a:r>
-              <a:rPr sz="1400" b="0">
+            <a:ext cx="8229600" cy="707886"/>
+          </a:xfrm>
+          <a:prstGeom prst="rect">
+            <a:avLst/>
+          </a:prstGeom>
+          <a:noFill/>
+        </p:spPr>
+        <p:txBody>
+          <a:bodyPr wrap="square">
+            <a:spAutoFit/>
+          </a:bodyPr>
+          <a:lstStyle/>
+          <a:p>
+            <a:pPr algn="l"/>
+            <a:r>
+              <a:rPr sz="1400" b="0" dirty="0">
                 <a:solidFill>
                   <a:srgbClr val="CCDDEE"/>
                 </a:solidFill>
               </a:rPr>
-              <a:t>Student: Ankit Kumar  |  Roll No: 2024TM93022</a:t>
-            </a:r>
-          </a:p>
-          <a:p>
-            <a:pPr algn="l"/>
-            <a:r>
-              <a:rPr sz="1300" b="0">
+              <a:t>Student: </a:t>
+            </a:r>
+            <a:r>
+              <a:rPr lang="en-US" sz="1400" b="0" dirty="0">
+                <a:solidFill>
+                  <a:srgbClr val="CCDDEE"/>
+                </a:solidFill>
+              </a:rPr>
+              <a:t>Revathi C </a:t>
+            </a:r>
+            <a:r>
+              <a:rPr sz="1400" b="0" dirty="0">
+                <a:solidFill>
+                  <a:srgbClr val="CCDDEE"/>
+                </a:solidFill>
+              </a:rPr>
+              <a:t>|  Roll No: 2024TM93022</a:t>
+            </a:r>
+          </a:p>
+          <a:p>
+            <a:pPr algn="l"/>
+            <a:r>
+              <a:rPr sz="1300" b="0" dirty="0">
                 <a:solidFill>
                   <a:srgbClr val="647487"/>
                 </a:solidFill>
@@ -3543,7 +4088,7 @@
           <a:p>
             <a:pPr algn="l"/>
             <a:r>
-              <a:rPr sz="1300" b="0">
+              <a:rPr sz="1300" b="0" dirty="0">
                 <a:solidFill>
                   <a:srgbClr val="647487"/>
                 </a:solidFill>
@@ -3593,6 +4138,7 @@
           <a:lstStyle/>
           <a:p>
             <a:pPr algn="ctr"/>
+            <a:endParaRPr/>
           </a:p>
         </p:txBody>
       </p:sp>
@@ -3670,6 +4216,7 @@
           <a:lstStyle/>
           <a:p>
             <a:pPr algn="ctr"/>
+            <a:endParaRPr/>
           </a:p>
         </p:txBody>
       </p:sp>
@@ -3747,6 +4294,7 @@
           <a:lstStyle/>
           <a:p>
             <a:pPr algn="ctr"/>
+            <a:endParaRPr/>
           </a:p>
         </p:txBody>
       </p:sp>
@@ -3824,6 +4372,7 @@
           <a:lstStyle/>
           <a:p>
             <a:pPr algn="ctr"/>
+            <a:endParaRPr/>
           </a:p>
         </p:txBody>
       </p:sp>
@@ -3901,6 +4450,7 @@
           <a:lstStyle/>
           <a:p>
             <a:pPr algn="ctr"/>
+            <a:endParaRPr/>
           </a:p>
         </p:txBody>
       </p:sp>
@@ -3978,6 +4528,7 @@
           <a:lstStyle/>
           <a:p>
             <a:pPr algn="ctr"/>
+            <a:endParaRPr/>
           </a:p>
         </p:txBody>
       </p:sp>
@@ -4055,6 +4606,7 @@
           <a:lstStyle/>
           <a:p>
             <a:pPr algn="ctr"/>
+            <a:endParaRPr/>
           </a:p>
         </p:txBody>
       </p:sp>
@@ -4100,6 +4652,7 @@
           <a:lstStyle/>
           <a:p>
             <a:pPr algn="ctr"/>
+            <a:endParaRPr/>
           </a:p>
         </p:txBody>
       </p:sp>
@@ -4127,7 +4680,7 @@
           <a:p>
             <a:pPr algn="ctr"/>
             <a:r>
-              <a:rPr sz="1100" b="0" i="1">
+              <a:rPr sz="1100" b="0" i="1" dirty="0">
                 <a:solidFill>
                   <a:srgbClr val="647487"/>
                 </a:solidFill>
@@ -4178,6 +4731,7 @@
           <a:lstStyle/>
           <a:p>
             <a:pPr algn="ctr"/>
+            <a:endParaRPr/>
           </a:p>
         </p:txBody>
       </p:sp>
@@ -4249,6 +4803,36 @@
           </a:p>
         </p:txBody>
       </p:sp>
+      <p:pic>
+        <p:nvPicPr>
+          <p:cNvPr id="32" name="Picture 31">
+            <a:extLst>
+              <a:ext uri="{FF2B5EF4-FFF2-40B4-BE49-F238E27FC236}">
+                <a16:creationId xmlns:a16="http://schemas.microsoft.com/office/drawing/2014/main" id="{0995C881-4D23-D808-0EC6-ECA8F707B245}"/>
+              </a:ext>
+            </a:extLst>
+          </p:cNvPr>
+          <p:cNvPicPr>
+            <a:picLocks noChangeAspect="1"/>
+          </p:cNvPicPr>
+          <p:nvPr/>
+        </p:nvPicPr>
+        <p:blipFill>
+          <a:blip r:embed="rId3"/>
+          <a:stretch>
+            <a:fillRect/>
+          </a:stretch>
+        </p:blipFill>
+        <p:spPr>
+          <a:xfrm>
+            <a:off x="8566367" y="1737360"/>
+            <a:ext cx="3275113" cy="1902326"/>
+          </a:xfrm>
+          <a:prstGeom prst="rect">
+            <a:avLst/>
+          </a:prstGeom>
+        </p:spPr>
+      </p:pic>
     </p:spTree>
   </p:cSld>
   <p:clrMapOvr>
@@ -4258,7 +4842,7 @@
 </file>
 
 <file path=ppt/slides/slide10.xml><?xml version="1.0" encoding="utf-8"?>
-<p:sld xmlns:a="http://schemas.openxmlformats.org/drawingml/2006/main" xmlns:p="http://schemas.openxmlformats.org/presentationml/2006/main" xmlns:r="http://schemas.openxmlformats.org/officeDocument/2006/relationships">
+<p:sld xmlns:a="http://schemas.openxmlformats.org/drawingml/2006/main" xmlns:r="http://schemas.openxmlformats.org/officeDocument/2006/relationships" xmlns:p="http://schemas.openxmlformats.org/presentationml/2006/main">
   <p:cSld>
     <p:spTree>
       <p:nvGrpSpPr>
@@ -4266,7 +4850,14 @@
         <p:cNvGrpSpPr/>
         <p:nvPr/>
       </p:nvGrpSpPr>
-      <p:grpSpPr/>
+      <p:grpSpPr>
+        <a:xfrm>
+          <a:off x="0" y="0"/>
+          <a:ext cx="0" cy="0"/>
+          <a:chOff x="0" y="0"/>
+          <a:chExt cx="0" cy="0"/>
+        </a:xfrm>
+      </p:grpSpPr>
       <p:sp>
         <p:nvSpPr>
           <p:cNvPr id="2" name="Rectangle 1"/>
@@ -4307,6 +4898,7 @@
           <a:lstStyle/>
           <a:p>
             <a:pPr algn="ctr"/>
+            <a:endParaRPr/>
           </a:p>
         </p:txBody>
       </p:sp>
@@ -4350,6 +4942,7 @@
           <a:lstStyle/>
           <a:p>
             <a:pPr algn="ctr"/>
+            <a:endParaRPr/>
           </a:p>
         </p:txBody>
       </p:sp>
@@ -4463,6 +5056,7 @@
           <a:lstStyle/>
           <a:p>
             <a:pPr algn="ctr"/>
+            <a:endParaRPr/>
           </a:p>
         </p:txBody>
       </p:sp>
@@ -4540,6 +5134,7 @@
           <a:lstStyle/>
           <a:p>
             <a:pPr algn="ctr"/>
+            <a:endParaRPr/>
           </a:p>
         </p:txBody>
       </p:sp>
@@ -4685,6 +5280,7 @@
           <a:lstStyle/>
           <a:p>
             <a:pPr algn="ctr"/>
+            <a:endParaRPr/>
           </a:p>
         </p:txBody>
       </p:sp>
@@ -4830,6 +5426,7 @@
           <a:lstStyle/>
           <a:p>
             <a:pPr algn="ctr"/>
+            <a:endParaRPr/>
           </a:p>
         </p:txBody>
       </p:sp>
@@ -4975,6 +5572,7 @@
           <a:lstStyle/>
           <a:p>
             <a:pPr algn="ctr"/>
+            <a:endParaRPr/>
           </a:p>
         </p:txBody>
       </p:sp>
@@ -5120,6 +5718,7 @@
           <a:lstStyle/>
           <a:p>
             <a:pPr algn="ctr"/>
+            <a:endParaRPr/>
           </a:p>
         </p:txBody>
       </p:sp>
@@ -5265,6 +5864,7 @@
           <a:lstStyle/>
           <a:p>
             <a:pPr algn="ctr"/>
+            <a:endParaRPr/>
           </a:p>
         </p:txBody>
       </p:sp>
@@ -5410,6 +6010,7 @@
           <a:lstStyle/>
           <a:p>
             <a:pPr algn="ctr"/>
+            <a:endParaRPr/>
           </a:p>
         </p:txBody>
       </p:sp>
@@ -5555,6 +6156,7 @@
           <a:lstStyle/>
           <a:p>
             <a:pPr algn="ctr"/>
+            <a:endParaRPr/>
           </a:p>
         </p:txBody>
       </p:sp>
@@ -5700,6 +6302,7 @@
           <a:lstStyle/>
           <a:p>
             <a:pPr algn="ctr"/>
+            <a:endParaRPr/>
           </a:p>
         </p:txBody>
       </p:sp>
@@ -5845,6 +6448,7 @@
           <a:lstStyle/>
           <a:p>
             <a:pPr algn="ctr"/>
+            <a:endParaRPr/>
           </a:p>
         </p:txBody>
       </p:sp>
@@ -5992,6 +6596,7 @@
           <a:lstStyle/>
           <a:p>
             <a:pPr algn="ctr"/>
+            <a:endParaRPr/>
           </a:p>
         </p:txBody>
       </p:sp>
@@ -6019,12 +6624,28 @@
           <a:p>
             <a:pPr algn="ctr"/>
             <a:r>
-              <a:rPr sz="1100" b="0" i="1">
+              <a:rPr sz="1100" b="0" i="1" dirty="0">
                 <a:solidFill>
                   <a:srgbClr val="647487"/>
                 </a:solidFill>
               </a:rPr>
-              <a:t>[Screenshot: py run_demo.py console output
+              <a:t>[Screenshot: </a:t>
+            </a:r>
+            <a:r>
+              <a:rPr sz="1100" b="0" i="1" dirty="0" err="1">
+                <a:solidFill>
+                  <a:srgbClr val="647487"/>
+                </a:solidFill>
+              </a:rPr>
+              <a:t>py</a:t>
+            </a:r>
+            <a:r>
+              <a:rPr sz="1100" b="0" i="1" dirty="0">
+                <a:solidFill>
+                  <a:srgbClr val="647487"/>
+                </a:solidFill>
+              </a:rPr>
+              <a:t> run_demo.py console output
 showing 10 tests PASSED]</a:t>
             </a:r>
           </a:p>
@@ -6070,6 +6691,7 @@
           <a:lstStyle/>
           <a:p>
             <a:pPr algn="ctr"/>
+            <a:endParaRPr/>
           </a:p>
         </p:txBody>
       </p:sp>
@@ -6131,7 +6753,7 @@
           <a:p>
             <a:pPr algn="l"/>
             <a:r>
-              <a:rPr sz="900" b="0">
+              <a:rPr sz="900" b="0" dirty="0">
                 <a:solidFill>
                   <a:srgbClr val="28A745"/>
                 </a:solidFill>
@@ -6187,6 +6809,7 @@
           <a:lstStyle/>
           <a:p>
             <a:pPr algn="ctr"/>
+            <a:endParaRPr/>
           </a:p>
         </p:txBody>
       </p:sp>
@@ -6299,6 +6922,7 @@
           <a:lstStyle/>
           <a:p>
             <a:pPr algn="ctr"/>
+            <a:endParaRPr/>
           </a:p>
         </p:txBody>
       </p:sp>
@@ -6411,6 +7035,7 @@
           <a:lstStyle/>
           <a:p>
             <a:pPr algn="ctr"/>
+            <a:endParaRPr/>
           </a:p>
         </p:txBody>
       </p:sp>
@@ -6523,6 +7148,7 @@
           <a:lstStyle/>
           <a:p>
             <a:pPr algn="ctr"/>
+            <a:endParaRPr/>
           </a:p>
         </p:txBody>
       </p:sp>
@@ -6636,6 +7262,7 @@
           <a:lstStyle/>
           <a:p>
             <a:pPr algn="ctr"/>
+            <a:endParaRPr/>
           </a:p>
         </p:txBody>
       </p:sp>
@@ -6758,6 +7385,7 @@
           <a:lstStyle/>
           <a:p>
             <a:pPr algn="ctr"/>
+            <a:endParaRPr/>
           </a:p>
         </p:txBody>
       </p:sp>
@@ -6829,6 +7457,36 @@
           </a:p>
         </p:txBody>
       </p:sp>
+      <p:pic>
+        <p:nvPicPr>
+          <p:cNvPr id="72" name="Picture 71">
+            <a:extLst>
+              <a:ext uri="{FF2B5EF4-FFF2-40B4-BE49-F238E27FC236}">
+                <a16:creationId xmlns:a16="http://schemas.microsoft.com/office/drawing/2014/main" id="{C360A72B-834B-299E-38B4-9040DECA66B3}"/>
+              </a:ext>
+            </a:extLst>
+          </p:cNvPr>
+          <p:cNvPicPr>
+            <a:picLocks noChangeAspect="1"/>
+          </p:cNvPicPr>
+          <p:nvPr/>
+        </p:nvPicPr>
+        <p:blipFill>
+          <a:blip r:embed="rId2"/>
+          <a:stretch>
+            <a:fillRect/>
+          </a:stretch>
+        </p:blipFill>
+        <p:spPr>
+          <a:xfrm>
+            <a:off x="3889587" y="2694447"/>
+            <a:ext cx="4417673" cy="1758681"/>
+          </a:xfrm>
+          <a:prstGeom prst="rect">
+            <a:avLst/>
+          </a:prstGeom>
+        </p:spPr>
+      </p:pic>
     </p:spTree>
   </p:cSld>
   <p:clrMapOvr>
@@ -6838,7 +7496,7 @@
 </file>
 
 <file path=ppt/slides/slide11.xml><?xml version="1.0" encoding="utf-8"?>
-<p:sld xmlns:a="http://schemas.openxmlformats.org/drawingml/2006/main" xmlns:p="http://schemas.openxmlformats.org/presentationml/2006/main" xmlns:r="http://schemas.openxmlformats.org/officeDocument/2006/relationships">
+<p:sld xmlns:a="http://schemas.openxmlformats.org/drawingml/2006/main" xmlns:r="http://schemas.openxmlformats.org/officeDocument/2006/relationships" xmlns:p="http://schemas.openxmlformats.org/presentationml/2006/main">
   <p:cSld>
     <p:spTree>
       <p:nvGrpSpPr>
@@ -6846,7 +7504,14 @@
         <p:cNvGrpSpPr/>
         <p:nvPr/>
       </p:nvGrpSpPr>
-      <p:grpSpPr/>
+      <p:grpSpPr>
+        <a:xfrm>
+          <a:off x="0" y="0"/>
+          <a:ext cx="0" cy="0"/>
+          <a:chOff x="0" y="0"/>
+          <a:chExt cx="0" cy="0"/>
+        </a:xfrm>
+      </p:grpSpPr>
       <p:sp>
         <p:nvSpPr>
           <p:cNvPr id="2" name="Rectangle 1"/>
@@ -6887,6 +7552,7 @@
           <a:lstStyle/>
           <a:p>
             <a:pPr algn="ctr"/>
+            <a:endParaRPr/>
           </a:p>
         </p:txBody>
       </p:sp>
@@ -6930,6 +7596,7 @@
           <a:lstStyle/>
           <a:p>
             <a:pPr algn="ctr"/>
+            <a:endParaRPr/>
           </a:p>
         </p:txBody>
       </p:sp>
@@ -7043,6 +7710,7 @@
           <a:lstStyle/>
           <a:p>
             <a:pPr algn="ctr"/>
+            <a:endParaRPr/>
           </a:p>
         </p:txBody>
       </p:sp>
@@ -7120,6 +7788,7 @@
           <a:lstStyle/>
           <a:p>
             <a:pPr algn="ctr"/>
+            <a:endParaRPr/>
           </a:p>
         </p:txBody>
       </p:sp>
@@ -7269,6 +7938,7 @@
           <a:lstStyle/>
           <a:p>
             <a:pPr algn="ctr"/>
+            <a:endParaRPr/>
           </a:p>
         </p:txBody>
       </p:sp>
@@ -7346,6 +8016,7 @@
           <a:lstStyle/>
           <a:p>
             <a:pPr algn="ctr"/>
+            <a:endParaRPr/>
           </a:p>
         </p:txBody>
       </p:sp>
@@ -7495,6 +8166,7 @@
           <a:lstStyle/>
           <a:p>
             <a:pPr algn="ctr"/>
+            <a:endParaRPr/>
           </a:p>
         </p:txBody>
       </p:sp>
@@ -7572,6 +8244,7 @@
           <a:lstStyle/>
           <a:p>
             <a:pPr algn="ctr"/>
+            <a:endParaRPr/>
           </a:p>
         </p:txBody>
       </p:sp>
@@ -7721,6 +8394,7 @@
           <a:lstStyle/>
           <a:p>
             <a:pPr algn="ctr"/>
+            <a:endParaRPr/>
           </a:p>
         </p:txBody>
       </p:sp>
@@ -7798,6 +8472,7 @@
           <a:lstStyle/>
           <a:p>
             <a:pPr algn="ctr"/>
+            <a:endParaRPr/>
           </a:p>
         </p:txBody>
       </p:sp>
@@ -7947,6 +8622,7 @@
           <a:lstStyle/>
           <a:p>
             <a:pPr algn="ctr"/>
+            <a:endParaRPr/>
           </a:p>
         </p:txBody>
       </p:sp>
@@ -8024,6 +8700,7 @@
           <a:lstStyle/>
           <a:p>
             <a:pPr algn="ctr"/>
+            <a:endParaRPr/>
           </a:p>
         </p:txBody>
       </p:sp>
@@ -8173,6 +8850,7 @@
           <a:lstStyle/>
           <a:p>
             <a:pPr algn="ctr"/>
+            <a:endParaRPr/>
           </a:p>
         </p:txBody>
       </p:sp>
@@ -8250,6 +8928,7 @@
           <a:lstStyle/>
           <a:p>
             <a:pPr algn="ctr"/>
+            <a:endParaRPr/>
           </a:p>
         </p:txBody>
       </p:sp>
@@ -8397,6 +9076,7 @@
           <a:lstStyle/>
           <a:p>
             <a:pPr algn="ctr"/>
+            <a:endParaRPr/>
           </a:p>
         </p:txBody>
       </p:sp>
@@ -8477,7 +9157,7 @@
 </file>
 
 <file path=ppt/slides/slide12.xml><?xml version="1.0" encoding="utf-8"?>
-<p:sld xmlns:a="http://schemas.openxmlformats.org/drawingml/2006/main" xmlns:p="http://schemas.openxmlformats.org/presentationml/2006/main" xmlns:r="http://schemas.openxmlformats.org/officeDocument/2006/relationships">
+<p:sld xmlns:a="http://schemas.openxmlformats.org/drawingml/2006/main" xmlns:r="http://schemas.openxmlformats.org/officeDocument/2006/relationships" xmlns:p="http://schemas.openxmlformats.org/presentationml/2006/main">
   <p:cSld>
     <p:spTree>
       <p:nvGrpSpPr>
@@ -8485,7 +9165,14 @@
         <p:cNvGrpSpPr/>
         <p:nvPr/>
       </p:nvGrpSpPr>
-      <p:grpSpPr/>
+      <p:grpSpPr>
+        <a:xfrm>
+          <a:off x="0" y="0"/>
+          <a:ext cx="0" cy="0"/>
+          <a:chOff x="0" y="0"/>
+          <a:chExt cx="0" cy="0"/>
+        </a:xfrm>
+      </p:grpSpPr>
       <p:sp>
         <p:nvSpPr>
           <p:cNvPr id="2" name="Rectangle 1"/>
@@ -8526,6 +9213,7 @@
           <a:lstStyle/>
           <a:p>
             <a:pPr algn="ctr"/>
+            <a:endParaRPr/>
           </a:p>
         </p:txBody>
       </p:sp>
@@ -8569,6 +9257,7 @@
           <a:lstStyle/>
           <a:p>
             <a:pPr algn="ctr"/>
+            <a:endParaRPr/>
           </a:p>
         </p:txBody>
       </p:sp>
@@ -8682,6 +9371,7 @@
           <a:lstStyle/>
           <a:p>
             <a:pPr algn="ctr"/>
+            <a:endParaRPr/>
           </a:p>
         </p:txBody>
       </p:sp>
@@ -8775,13 +9465,21 @@
           </a:p>
           <a:p>
             <a:pPr algn="l"/>
+            <a:endParaRPr sz="1050" b="0">
+              <a:solidFill>
+                <a:srgbClr val="333D4B"/>
+              </a:solidFill>
+            </a:endParaRPr>
+          </a:p>
+          <a:p>
+            <a:pPr algn="l"/>
             <a:r>
               <a:rPr sz="1050" b="0">
                 <a:solidFill>
                   <a:srgbClr val="333D4B"/>
                 </a:solidFill>
               </a:rPr>
-              <a:t/>
+              <a:t>APIs Used (read-only):</a:t>
             </a:r>
           </a:p>
           <a:p>
@@ -8792,7 +9490,7 @@
                   <a:srgbClr val="333D4B"/>
                 </a:solidFill>
               </a:rPr>
-              <a:t>APIs Used (read-only):</a:t>
+              <a:t>  GET  /api/v3/projects</a:t>
             </a:r>
           </a:p>
           <a:p>
@@ -8803,7 +9501,7 @@
                   <a:srgbClr val="333D4B"/>
                 </a:solidFill>
               </a:rPr>
-              <a:t>  GET  /api/v3/projects</a:t>
+              <a:t>  POST /api/v3/projects/{id}/search</a:t>
             </a:r>
           </a:p>
           <a:p>
@@ -8814,7 +9512,7 @@
                   <a:srgbClr val="333D4B"/>
                 </a:solidFill>
               </a:rPr>
-              <a:t>  POST /api/v3/projects/{id}/search</a:t>
+              <a:t>  GET  /api/v3/.../test-cases/{id}</a:t>
             </a:r>
           </a:p>
           <a:p>
@@ -8825,30 +9523,16 @@
                   <a:srgbClr val="333D4B"/>
                 </a:solidFill>
               </a:rPr>
-              <a:t>  GET  /api/v3/.../test-cases/{id}</a:t>
-            </a:r>
-          </a:p>
-          <a:p>
-            <a:pPr algn="l"/>
-            <a:r>
-              <a:rPr sz="1050" b="0">
-                <a:solidFill>
-                  <a:srgbClr val="333D4B"/>
-                </a:solidFill>
-              </a:rPr>
               <a:t>  GET  /api/v3/.../test-steps</a:t>
             </a:r>
           </a:p>
           <a:p>
             <a:pPr algn="l"/>
-            <a:r>
-              <a:rPr sz="1050" b="0">
-                <a:solidFill>
-                  <a:srgbClr val="333D4B"/>
-                </a:solidFill>
-              </a:rPr>
-              <a:t/>
-            </a:r>
+            <a:endParaRPr sz="1050" b="0">
+              <a:solidFill>
+                <a:srgbClr val="333D4B"/>
+              </a:solidFill>
+            </a:endParaRPr>
           </a:p>
           <a:p>
             <a:pPr algn="l"/>
@@ -8961,6 +9645,7 @@
           <a:lstStyle/>
           <a:p>
             <a:pPr algn="ctr"/>
+            <a:endParaRPr/>
           </a:p>
         </p:txBody>
       </p:sp>
@@ -9076,13 +9761,21 @@
           </a:p>
           <a:p>
             <a:pPr algn="l"/>
+            <a:endParaRPr sz="1000" b="0">
+              <a:solidFill>
+                <a:srgbClr val="333D4B"/>
+              </a:solidFill>
+            </a:endParaRPr>
+          </a:p>
+          <a:p>
+            <a:pPr algn="l"/>
             <a:r>
               <a:rPr sz="1000" b="0">
                 <a:solidFill>
                   <a:srgbClr val="333D4B"/>
                 </a:solidFill>
               </a:rPr>
-              <a:t/>
+              <a:t>Demo (ShopEasy):</a:t>
             </a:r>
           </a:p>
           <a:p>
@@ -9093,7 +9786,7 @@
                   <a:srgbClr val="333D4B"/>
                 </a:solidFill>
               </a:rPr>
-              <a:t>Demo (ShopEasy):</a:t>
+              <a:t>  10 TCs from JSON</a:t>
             </a:r>
           </a:p>
           <a:p>
@@ -9104,7 +9797,7 @@
                   <a:srgbClr val="333D4B"/>
                 </a:solidFill>
               </a:rPr>
-              <a:t>  10 TCs from JSON</a:t>
+              <a:t>  SimpleTestGenerator</a:t>
             </a:r>
           </a:p>
           <a:p>
@@ -9115,7 +9808,7 @@
                   <a:srgbClr val="333D4B"/>
                 </a:solidFill>
               </a:rPr>
-              <a:t>  SimpleTestGenerator</a:t>
+              <a:t>  standalone_framework</a:t>
             </a:r>
           </a:p>
           <a:p>
@@ -9126,30 +9819,16 @@
                   <a:srgbClr val="333D4B"/>
                 </a:solidFill>
               </a:rPr>
-              <a:t>  standalone_framework</a:t>
-            </a:r>
-          </a:p>
-          <a:p>
-            <a:pPr algn="l"/>
-            <a:r>
-              <a:rPr sz="1000" b="0">
-                <a:solidFill>
-                  <a:srgbClr val="333D4B"/>
-                </a:solidFill>
-              </a:rPr>
               <a:t>  Mock ShopEasy API</a:t>
             </a:r>
           </a:p>
           <a:p>
             <a:pPr algn="l"/>
-            <a:r>
-              <a:rPr sz="1000" b="0">
-                <a:solidFill>
-                  <a:srgbClr val="333D4B"/>
-                </a:solidFill>
-              </a:rPr>
-              <a:t/>
-            </a:r>
+            <a:endParaRPr sz="1000" b="0">
+              <a:solidFill>
+                <a:srgbClr val="333D4B"/>
+              </a:solidFill>
+            </a:endParaRPr>
           </a:p>
           <a:p>
             <a:pPr algn="l"/>
@@ -9263,6 +9942,7 @@
           <a:lstStyle/>
           <a:p>
             <a:pPr algn="ctr"/>
+            <a:endParaRPr/>
           </a:p>
         </p:txBody>
       </p:sp>
@@ -9309,180 +9989,122 @@
         <p:spPr>
           <a:xfrm>
             <a:off x="8549640" y="1691640"/>
-            <a:ext cx="3200400" cy="4389120"/>
-          </a:xfrm>
-          <a:prstGeom prst="rect">
-            <a:avLst/>
-          </a:prstGeom>
-          <a:noFill/>
-        </p:spPr>
-        <p:txBody>
-          <a:bodyPr wrap="square">
-            <a:spAutoFit/>
-          </a:bodyPr>
-          <a:lstStyle/>
-          <a:p>
-            <a:pPr algn="l"/>
-            <a:r>
-              <a:rPr sz="1000" b="0">
-                <a:solidFill>
-                  <a:srgbClr val="CCDDFF"/>
-                </a:solidFill>
-              </a:rPr>
+            <a:ext cx="3200400" cy="2400657"/>
+          </a:xfrm>
+          <a:prstGeom prst="rect">
+            <a:avLst/>
+          </a:prstGeom>
+          <a:noFill/>
+        </p:spPr>
+        <p:txBody>
+          <a:bodyPr wrap="square">
+            <a:spAutoFit/>
+          </a:bodyPr>
+          <a:lstStyle/>
+          <a:p>
+            <a:pPr algn="l"/>
+            <a:r>
+              <a:rPr sz="1000" b="0" dirty="0"/>
               <a:t>IP: 100.100.4.189</a:t>
             </a:r>
           </a:p>
           <a:p>
             <a:pPr algn="l"/>
             <a:r>
-              <a:rPr sz="1000" b="0">
-                <a:solidFill>
-                  <a:srgbClr val="CCDDFF"/>
-                </a:solidFill>
-              </a:rPr>
+              <a:rPr sz="1000" b="0" dirty="0"/>
               <a:t>Protocol: HTTPS (port 443)</a:t>
             </a:r>
           </a:p>
           <a:p>
             <a:pPr algn="l"/>
             <a:r>
-              <a:rPr sz="1000" b="0">
-                <a:solidFill>
-                  <a:srgbClr val="CCDDFF"/>
-                </a:solidFill>
-              </a:rPr>
+              <a:rPr sz="1000" b="0" dirty="0"/>
               <a:t>Auth: admin credentials</a:t>
             </a:r>
           </a:p>
           <a:p>
             <a:pPr algn="l"/>
-            <a:r>
-              <a:rPr sz="1000" b="0">
-                <a:solidFill>
-                  <a:srgbClr val="CCDDFF"/>
-                </a:solidFill>
-              </a:rPr>
-              <a:t/>
-            </a:r>
-          </a:p>
-          <a:p>
-            <a:pPr algn="l"/>
-            <a:r>
-              <a:rPr sz="1000" b="0">
-                <a:solidFill>
-                  <a:srgbClr val="CCDDFF"/>
-                </a:solidFill>
-              </a:rPr>
+            <a:endParaRPr sz="1000" b="0" dirty="0"/>
+          </a:p>
+          <a:p>
+            <a:pPr algn="l"/>
+            <a:r>
+              <a:rPr sz="1000" b="0" dirty="0"/>
               <a:t>Features Tested:</a:t>
             </a:r>
           </a:p>
           <a:p>
             <a:pPr algn="l"/>
             <a:r>
-              <a:rPr sz="1000" b="0">
-                <a:solidFill>
-                  <a:srgbClr val="CCDDFF"/>
-                </a:solidFill>
-              </a:rPr>
+              <a:rPr sz="1000" b="0" dirty="0"/>
               <a:t>  Plugin install/enable</a:t>
             </a:r>
           </a:p>
           <a:p>
             <a:pPr algn="l"/>
             <a:r>
-              <a:rPr sz="1000" b="0">
-                <a:solidFill>
-                  <a:srgbClr val="CCDDFF"/>
-                </a:solidFill>
-              </a:rPr>
+              <a:rPr sz="1000" b="0" dirty="0"/>
               <a:t>  Device discovery</a:t>
             </a:r>
           </a:p>
           <a:p>
             <a:pPr algn="l"/>
             <a:r>
-              <a:rPr sz="1000" b="0">
-                <a:solidFill>
-                  <a:srgbClr val="CCDDFF"/>
-                </a:solidFill>
-              </a:rPr>
+              <a:rPr sz="1000" b="0" dirty="0"/>
               <a:t>  Static group creation</a:t>
             </a:r>
           </a:p>
           <a:p>
             <a:pPr algn="l"/>
             <a:r>
-              <a:rPr sz="1000" b="0">
-                <a:solidFill>
-                  <a:srgbClr val="CCDDFF"/>
-                </a:solidFill>
-              </a:rPr>
+              <a:rPr sz="1000" b="0" dirty="0"/>
               <a:t>  Health monitoring</a:t>
             </a:r>
           </a:p>
           <a:p>
             <a:pPr algn="l"/>
             <a:r>
-              <a:rPr sz="1000" b="0">
-                <a:solidFill>
-                  <a:srgbClr val="CCDDFF"/>
-                </a:solidFill>
-              </a:rPr>
+              <a:rPr sz="1000" b="0" dirty="0"/>
               <a:t>  SCOM/SCVMM integration</a:t>
             </a:r>
           </a:p>
           <a:p>
             <a:pPr algn="l"/>
             <a:r>
-              <a:rPr sz="1000" b="0">
-                <a:solidFill>
-                  <a:srgbClr val="CCDDFF"/>
-                </a:solidFill>
-              </a:rPr>
+              <a:rPr sz="1000" b="0" dirty="0"/>
               <a:t>  Firmware catalog/repo</a:t>
             </a:r>
           </a:p>
           <a:p>
             <a:pPr algn="l"/>
             <a:r>
-              <a:rPr sz="1000" b="0">
-                <a:solidFill>
-                  <a:srgbClr val="CCDDFF"/>
-                </a:solidFill>
-              </a:rPr>
+              <a:rPr sz="1000" b="0" dirty="0"/>
               <a:t>  Compliance baselines</a:t>
             </a:r>
           </a:p>
           <a:p>
             <a:pPr algn="l"/>
-            <a:r>
-              <a:rPr sz="1000" b="0">
-                <a:solidFill>
-                  <a:srgbClr val="CCDDFF"/>
-                </a:solidFill>
-              </a:rPr>
-              <a:t/>
-            </a:r>
-          </a:p>
-          <a:p>
-            <a:pPr algn="l"/>
-            <a:r>
-              <a:rPr sz="1000" b="0">
-                <a:solidFill>
-                  <a:srgbClr val="CCDDFF"/>
-                </a:solidFill>
-              </a:rPr>
-              <a:t>Framework: atlas-ome-staging</a:t>
-            </a:r>
-          </a:p>
-          <a:p>
-            <a:pPr algn="l"/>
-            <a:r>
-              <a:rPr sz="1000" b="0">
-                <a:solidFill>
-                  <a:srgbClr val="CCDDFF"/>
-                </a:solidFill>
-              </a:rPr>
+            <a:endParaRPr sz="1000" b="0" dirty="0"/>
+          </a:p>
+          <a:p>
+            <a:pPr algn="l"/>
+            <a:r>
+              <a:rPr sz="1000" b="0" dirty="0"/>
+              <a:t>Framework: atlas-</a:t>
+            </a:r>
+            <a:r>
+              <a:rPr sz="1000" b="0" dirty="0" err="1"/>
+              <a:t>ome</a:t>
+            </a:r>
+            <a:r>
+              <a:rPr sz="1000" b="0" dirty="0"/>
+              <a:t>-staging</a:t>
+            </a:r>
+          </a:p>
+          <a:p>
+            <a:pPr algn="l"/>
+            <a:r>
+              <a:rPr sz="1000" b="0" dirty="0"/>
               <a:t>Test Results: 2 / 2 PASSED</a:t>
             </a:r>
           </a:p>
@@ -9528,6 +10150,7 @@
           <a:lstStyle/>
           <a:p>
             <a:pPr algn="ctr"/>
+            <a:endParaRPr/>
           </a:p>
         </p:txBody>
       </p:sp>
@@ -9608,7 +10231,7 @@
 </file>
 
 <file path=ppt/slides/slide13.xml><?xml version="1.0" encoding="utf-8"?>
-<p:sld xmlns:a="http://schemas.openxmlformats.org/drawingml/2006/main" xmlns:p="http://schemas.openxmlformats.org/presentationml/2006/main" xmlns:r="http://schemas.openxmlformats.org/officeDocument/2006/relationships">
+<p:sld xmlns:a="http://schemas.openxmlformats.org/drawingml/2006/main" xmlns:r="http://schemas.openxmlformats.org/officeDocument/2006/relationships" xmlns:p="http://schemas.openxmlformats.org/presentationml/2006/main">
   <p:cSld>
     <p:spTree>
       <p:nvGrpSpPr>
@@ -9616,7 +10239,14 @@
         <p:cNvGrpSpPr/>
         <p:nvPr/>
       </p:nvGrpSpPr>
-      <p:grpSpPr/>
+      <p:grpSpPr>
+        <a:xfrm>
+          <a:off x="0" y="0"/>
+          <a:ext cx="0" cy="0"/>
+          <a:chOff x="0" y="0"/>
+          <a:chExt cx="0" cy="0"/>
+        </a:xfrm>
+      </p:grpSpPr>
       <p:sp>
         <p:nvSpPr>
           <p:cNvPr id="2" name="Rectangle 1"/>
@@ -9657,6 +10287,7 @@
           <a:lstStyle/>
           <a:p>
             <a:pPr algn="ctr"/>
+            <a:endParaRPr/>
           </a:p>
         </p:txBody>
       </p:sp>
@@ -9700,6 +10331,7 @@
           <a:lstStyle/>
           <a:p>
             <a:pPr algn="ctr"/>
+            <a:endParaRPr/>
           </a:p>
         </p:txBody>
       </p:sp>
@@ -9811,6 +10443,7 @@
           <a:lstStyle/>
           <a:p>
             <a:pPr algn="ctr"/>
+            <a:endParaRPr/>
           </a:p>
         </p:txBody>
       </p:sp>
@@ -9823,27 +10456,35 @@
         <p:spPr>
           <a:xfrm>
             <a:off x="274320" y="1234440"/>
-            <a:ext cx="1828800" cy="548640"/>
-          </a:xfrm>
-          <a:prstGeom prst="rect">
-            <a:avLst/>
-          </a:prstGeom>
-          <a:noFill/>
-        </p:spPr>
-        <p:txBody>
-          <a:bodyPr wrap="square">
-            <a:spAutoFit/>
-          </a:bodyPr>
-          <a:lstStyle/>
-          <a:p>
-            <a:pPr algn="ctr"/>
-            <a:r>
-              <a:rPr sz="2800" b="1">
+            <a:ext cx="1828800" cy="523220"/>
+          </a:xfrm>
+          <a:prstGeom prst="rect">
+            <a:avLst/>
+          </a:prstGeom>
+          <a:noFill/>
+        </p:spPr>
+        <p:txBody>
+          <a:bodyPr wrap="square">
+            <a:spAutoFit/>
+          </a:bodyPr>
+          <a:lstStyle/>
+          <a:p>
+            <a:pPr algn="ctr"/>
+            <a:r>
+              <a:rPr lang="en-US" sz="2800" b="1" dirty="0">
                 <a:solidFill>
                   <a:srgbClr val="FFFFFF"/>
                 </a:solidFill>
               </a:rPr>
-              <a:t>10 / 10</a:t>
+              <a:t>2</a:t>
+            </a:r>
+            <a:r>
+              <a:rPr sz="2800" b="1" dirty="0">
+                <a:solidFill>
+                  <a:srgbClr val="FFFFFF"/>
+                </a:solidFill>
+              </a:rPr>
+              <a:t>/ 10</a:t>
             </a:r>
           </a:p>
         </p:txBody>
@@ -9922,6 +10563,7 @@
           <a:lstStyle/>
           <a:p>
             <a:pPr algn="ctr"/>
+            <a:endParaRPr/>
           </a:p>
         </p:txBody>
       </p:sp>
@@ -10033,6 +10675,7 @@
           <a:lstStyle/>
           <a:p>
             <a:pPr algn="ctr"/>
+            <a:endParaRPr/>
           </a:p>
         </p:txBody>
       </p:sp>
@@ -10045,27 +10688,35 @@
         <p:spPr>
           <a:xfrm>
             <a:off x="4206240" y="1234440"/>
-            <a:ext cx="1828800" cy="548640"/>
-          </a:xfrm>
-          <a:prstGeom prst="rect">
-            <a:avLst/>
-          </a:prstGeom>
-          <a:noFill/>
-        </p:spPr>
-        <p:txBody>
-          <a:bodyPr wrap="square">
-            <a:spAutoFit/>
-          </a:bodyPr>
-          <a:lstStyle/>
-          <a:p>
-            <a:pPr algn="ctr"/>
-            <a:r>
-              <a:rPr sz="2800" b="1">
+            <a:ext cx="1828800" cy="523220"/>
+          </a:xfrm>
+          <a:prstGeom prst="rect">
+            <a:avLst/>
+          </a:prstGeom>
+          <a:noFill/>
+        </p:spPr>
+        <p:txBody>
+          <a:bodyPr wrap="square">
+            <a:spAutoFit/>
+          </a:bodyPr>
+          <a:lstStyle/>
+          <a:p>
+            <a:pPr algn="ctr"/>
+            <a:r>
+              <a:rPr lang="en-US" sz="2800" b="1" dirty="0">
                 <a:solidFill>
                   <a:srgbClr val="FFFFFF"/>
                 </a:solidFill>
               </a:rPr>
-              <a:t>1.63s</a:t>
+              <a:t>300</a:t>
+            </a:r>
+            <a:r>
+              <a:rPr sz="2800" b="1" dirty="0">
+                <a:solidFill>
+                  <a:srgbClr val="FFFFFF"/>
+                </a:solidFill>
+              </a:rPr>
+              <a:t>s</a:t>
             </a:r>
           </a:p>
         </p:txBody>
@@ -10144,6 +10795,7 @@
           <a:lstStyle/>
           <a:p>
             <a:pPr algn="ctr"/>
+            <a:endParaRPr/>
           </a:p>
         </p:txBody>
       </p:sp>
@@ -10255,6 +10907,7 @@
           <a:lstStyle/>
           <a:p>
             <a:pPr algn="ctr"/>
+            <a:endParaRPr/>
           </a:p>
         </p:txBody>
       </p:sp>
@@ -10366,6 +11019,7 @@
           <a:lstStyle/>
           <a:p>
             <a:pPr algn="ctr"/>
+            <a:endParaRPr/>
           </a:p>
         </p:txBody>
       </p:sp>
@@ -10479,6 +11133,7 @@
           <a:lstStyle/>
           <a:p>
             <a:pPr algn="ctr"/>
+            <a:endParaRPr/>
           </a:p>
         </p:txBody>
       </p:sp>
@@ -10506,7 +11161,7 @@
           <a:p>
             <a:pPr algn="ctr"/>
             <a:r>
-              <a:rPr sz="1100" b="0" i="1">
+              <a:rPr sz="1100" b="0" i="1" dirty="0">
                 <a:solidFill>
                   <a:srgbClr val="647487"/>
                 </a:solidFill>
@@ -10591,6 +11246,7 @@
           <a:lstStyle/>
           <a:p>
             <a:pPr algn="ctr"/>
+            <a:endParaRPr/>
           </a:p>
         </p:txBody>
       </p:sp>
@@ -10838,6 +11494,7 @@
           <a:lstStyle/>
           <a:p>
             <a:pPr algn="ctr"/>
+            <a:endParaRPr/>
           </a:p>
         </p:txBody>
       </p:sp>
@@ -10987,27 +11644,35 @@
         <p:spPr>
           <a:xfrm>
             <a:off x="10881360" y="3319272"/>
-            <a:ext cx="731520" cy="548640"/>
-          </a:xfrm>
-          <a:prstGeom prst="rect">
-            <a:avLst/>
-          </a:prstGeom>
-          <a:noFill/>
-        </p:spPr>
-        <p:txBody>
-          <a:bodyPr wrap="square">
-            <a:spAutoFit/>
-          </a:bodyPr>
-          <a:lstStyle/>
-          <a:p>
-            <a:pPr algn="l"/>
-            <a:r>
-              <a:rPr sz="1000" b="0">
+            <a:ext cx="731520" cy="246221"/>
+          </a:xfrm>
+          <a:prstGeom prst="rect">
+            <a:avLst/>
+          </a:prstGeom>
+          <a:noFill/>
+        </p:spPr>
+        <p:txBody>
+          <a:bodyPr wrap="square">
+            <a:spAutoFit/>
+          </a:bodyPr>
+          <a:lstStyle/>
+          <a:p>
+            <a:pPr algn="l"/>
+            <a:r>
+              <a:rPr lang="en-US" sz="1000" b="0" dirty="0">
                 <a:solidFill>
                   <a:srgbClr val="333D4B"/>
                 </a:solidFill>
               </a:rPr>
-              <a:t>1.63s</a:t>
+              <a:t>300</a:t>
+            </a:r>
+            <a:r>
+              <a:rPr sz="1000" b="0" dirty="0">
+                <a:solidFill>
+                  <a:srgbClr val="333D4B"/>
+                </a:solidFill>
+              </a:rPr>
+              <a:t>s</a:t>
             </a:r>
           </a:p>
         </p:txBody>
@@ -11086,6 +11751,7 @@
           <a:lstStyle/>
           <a:p>
             <a:pPr algn="ctr"/>
+            <a:endParaRPr/>
           </a:p>
         </p:txBody>
       </p:sp>
@@ -11250,7 +11916,7 @@
           <a:p>
             <a:pPr algn="l"/>
             <a:r>
-              <a:rPr sz="1000" b="0">
+              <a:rPr sz="1000" b="0" dirty="0">
                 <a:solidFill>
                   <a:srgbClr val="333D4B"/>
                 </a:solidFill>
@@ -11504,6 +12170,7 @@
           <a:lstStyle/>
           <a:p>
             <a:pPr algn="ctr"/>
+            <a:endParaRPr/>
           </a:p>
         </p:txBody>
       </p:sp>
@@ -11575,6 +12242,36 @@
           </a:p>
         </p:txBody>
       </p:sp>
+      <p:pic>
+        <p:nvPicPr>
+          <p:cNvPr id="56" name="Picture 55">
+            <a:extLst>
+              <a:ext uri="{FF2B5EF4-FFF2-40B4-BE49-F238E27FC236}">
+                <a16:creationId xmlns:a16="http://schemas.microsoft.com/office/drawing/2014/main" id="{14601DB1-2669-A7AF-80A1-D5470ABC9821}"/>
+              </a:ext>
+            </a:extLst>
+          </p:cNvPr>
+          <p:cNvPicPr>
+            <a:picLocks noChangeAspect="1"/>
+          </p:cNvPicPr>
+          <p:nvPr/>
+        </p:nvPicPr>
+        <p:blipFill>
+          <a:blip r:embed="rId2"/>
+          <a:stretch>
+            <a:fillRect/>
+          </a:stretch>
+        </p:blipFill>
+        <p:spPr>
+          <a:xfrm>
+            <a:off x="365760" y="2885555"/>
+            <a:ext cx="5227526" cy="3007129"/>
+          </a:xfrm>
+          <a:prstGeom prst="rect">
+            <a:avLst/>
+          </a:prstGeom>
+        </p:spPr>
+      </p:pic>
     </p:spTree>
   </p:cSld>
   <p:clrMapOvr>
@@ -11584,7 +12281,7 @@
 </file>
 
 <file path=ppt/slides/slide14.xml><?xml version="1.0" encoding="utf-8"?>
-<p:sld xmlns:a="http://schemas.openxmlformats.org/drawingml/2006/main" xmlns:p="http://schemas.openxmlformats.org/presentationml/2006/main" xmlns:r="http://schemas.openxmlformats.org/officeDocument/2006/relationships">
+<p:sld xmlns:a="http://schemas.openxmlformats.org/drawingml/2006/main" xmlns:r="http://schemas.openxmlformats.org/officeDocument/2006/relationships" xmlns:p="http://schemas.openxmlformats.org/presentationml/2006/main">
   <p:cSld>
     <p:spTree>
       <p:nvGrpSpPr>
@@ -11592,7 +12289,14 @@
         <p:cNvGrpSpPr/>
         <p:nvPr/>
       </p:nvGrpSpPr>
-      <p:grpSpPr/>
+      <p:grpSpPr>
+        <a:xfrm>
+          <a:off x="0" y="0"/>
+          <a:ext cx="0" cy="0"/>
+          <a:chOff x="0" y="0"/>
+          <a:chExt cx="0" cy="0"/>
+        </a:xfrm>
+      </p:grpSpPr>
       <p:sp>
         <p:nvSpPr>
           <p:cNvPr id="2" name="Rectangle 1"/>
@@ -11633,6 +12337,7 @@
           <a:lstStyle/>
           <a:p>
             <a:pPr algn="ctr"/>
+            <a:endParaRPr/>
           </a:p>
         </p:txBody>
       </p:sp>
@@ -11676,6 +12381,7 @@
           <a:lstStyle/>
           <a:p>
             <a:pPr algn="ctr"/>
+            <a:endParaRPr/>
           </a:p>
         </p:txBody>
       </p:sp>
@@ -11789,6 +12495,7 @@
           <a:lstStyle/>
           <a:p>
             <a:pPr algn="ctr"/>
+            <a:endParaRPr/>
           </a:p>
         </p:txBody>
       </p:sp>
@@ -11832,6 +12539,7 @@
           <a:lstStyle/>
           <a:p>
             <a:pPr algn="ctr"/>
+            <a:endParaRPr/>
           </a:p>
         </p:txBody>
       </p:sp>
@@ -11980,6 +12688,7 @@
           <a:lstStyle/>
           <a:p>
             <a:pPr algn="ctr"/>
+            <a:endParaRPr/>
           </a:p>
         </p:txBody>
       </p:sp>
@@ -12023,6 +12732,7 @@
           <a:lstStyle/>
           <a:p>
             <a:pPr algn="ctr"/>
+            <a:endParaRPr/>
           </a:p>
         </p:txBody>
       </p:sp>
@@ -12172,6 +12882,7 @@
           <a:lstStyle/>
           <a:p>
             <a:pPr algn="ctr"/>
+            <a:endParaRPr/>
           </a:p>
         </p:txBody>
       </p:sp>
@@ -12215,6 +12926,7 @@
           <a:lstStyle/>
           <a:p>
             <a:pPr algn="ctr"/>
+            <a:endParaRPr/>
           </a:p>
         </p:txBody>
       </p:sp>
@@ -12364,6 +13076,7 @@
           <a:lstStyle/>
           <a:p>
             <a:pPr algn="ctr"/>
+            <a:endParaRPr/>
           </a:p>
         </p:txBody>
       </p:sp>
@@ -12407,6 +13120,7 @@
           <a:lstStyle/>
           <a:p>
             <a:pPr algn="ctr"/>
+            <a:endParaRPr/>
           </a:p>
         </p:txBody>
       </p:sp>
@@ -12556,6 +13270,7 @@
           <a:lstStyle/>
           <a:p>
             <a:pPr algn="ctr"/>
+            <a:endParaRPr/>
           </a:p>
         </p:txBody>
       </p:sp>
@@ -12599,6 +13314,7 @@
           <a:lstStyle/>
           <a:p>
             <a:pPr algn="ctr"/>
+            <a:endParaRPr/>
           </a:p>
         </p:txBody>
       </p:sp>
@@ -12748,6 +13464,7 @@
           <a:lstStyle/>
           <a:p>
             <a:pPr algn="ctr"/>
+            <a:endParaRPr/>
           </a:p>
         </p:txBody>
       </p:sp>
@@ -12791,6 +13508,7 @@
           <a:lstStyle/>
           <a:p>
             <a:pPr algn="ctr"/>
+            <a:endParaRPr/>
           </a:p>
         </p:txBody>
       </p:sp>
@@ -12972,6 +13690,7 @@
           <a:lstStyle/>
           <a:p>
             <a:pPr algn="ctr"/>
+            <a:endParaRPr/>
           </a:p>
         </p:txBody>
       </p:sp>
@@ -13015,6 +13734,7 @@
           <a:lstStyle/>
           <a:p>
             <a:pPr algn="ctr"/>
+            <a:endParaRPr/>
           </a:p>
         </p:txBody>
       </p:sp>
@@ -13092,6 +13812,7 @@
           <a:lstStyle/>
           <a:p>
             <a:pPr algn="ctr"/>
+            <a:endParaRPr/>
           </a:p>
         </p:txBody>
       </p:sp>
@@ -13172,7 +13893,7 @@
 </file>
 
 <file path=ppt/slides/slide15.xml><?xml version="1.0" encoding="utf-8"?>
-<p:sld xmlns:a="http://schemas.openxmlformats.org/drawingml/2006/main" xmlns:p="http://schemas.openxmlformats.org/presentationml/2006/main" xmlns:r="http://schemas.openxmlformats.org/officeDocument/2006/relationships">
+<p:sld xmlns:a="http://schemas.openxmlformats.org/drawingml/2006/main" xmlns:r="http://schemas.openxmlformats.org/officeDocument/2006/relationships" xmlns:p="http://schemas.openxmlformats.org/presentationml/2006/main">
   <p:cSld>
     <p:spTree>
       <p:nvGrpSpPr>
@@ -13180,7 +13901,14 @@
         <p:cNvGrpSpPr/>
         <p:nvPr/>
       </p:nvGrpSpPr>
-      <p:grpSpPr/>
+      <p:grpSpPr>
+        <a:xfrm>
+          <a:off x="0" y="0"/>
+          <a:ext cx="0" cy="0"/>
+          <a:chOff x="0" y="0"/>
+          <a:chExt cx="0" cy="0"/>
+        </a:xfrm>
+      </p:grpSpPr>
       <p:sp>
         <p:nvSpPr>
           <p:cNvPr id="2" name="Rectangle 1"/>
@@ -13221,6 +13949,7 @@
           <a:lstStyle/>
           <a:p>
             <a:pPr algn="ctr"/>
+            <a:endParaRPr/>
           </a:p>
         </p:txBody>
       </p:sp>
@@ -13264,6 +13993,7 @@
           <a:lstStyle/>
           <a:p>
             <a:pPr algn="ctr"/>
+            <a:endParaRPr/>
           </a:p>
         </p:txBody>
       </p:sp>
@@ -13343,7 +14073,7 @@
         </p:nvSpPr>
         <p:spPr>
           <a:xfrm>
-            <a:off x="274320" y="1143000"/>
+            <a:off x="137160" y="1097280"/>
             <a:ext cx="6858000" cy="5212080"/>
           </a:xfrm>
           <a:prstGeom prst="roundRect">
@@ -13377,6 +14107,7 @@
           <a:lstStyle/>
           <a:p>
             <a:pPr algn="ctr"/>
+            <a:endParaRPr/>
           </a:p>
         </p:txBody>
       </p:sp>
@@ -13388,7 +14119,7 @@
         </p:nvSpPr>
         <p:spPr>
           <a:xfrm>
-            <a:off x="411480" y="1234440"/>
+            <a:off x="2227811" y="1100605"/>
             <a:ext cx="6583680" cy="347472"/>
           </a:xfrm>
           <a:prstGeom prst="rect">
@@ -13404,7 +14135,7 @@
           <a:p>
             <a:pPr algn="l"/>
             <a:r>
-              <a:rPr sz="1400" b="1">
+              <a:rPr sz="1400" b="1" dirty="0">
                 <a:solidFill>
                   <a:srgbClr val="002B5C"/>
                 </a:solidFill>
@@ -13454,6 +14185,7 @@
           <a:lstStyle/>
           <a:p>
             <a:pPr algn="ctr"/>
+            <a:endParaRPr/>
           </a:p>
         </p:txBody>
       </p:sp>
@@ -13565,6 +14297,7 @@
           <a:lstStyle/>
           <a:p>
             <a:pPr algn="ctr"/>
+            <a:endParaRPr/>
           </a:p>
         </p:txBody>
       </p:sp>
@@ -13676,6 +14409,7 @@
           <a:lstStyle/>
           <a:p>
             <a:pPr algn="ctr"/>
+            <a:endParaRPr/>
           </a:p>
         </p:txBody>
       </p:sp>
@@ -13787,6 +14521,7 @@
           <a:lstStyle/>
           <a:p>
             <a:pPr algn="ctr"/>
+            <a:endParaRPr/>
           </a:p>
         </p:txBody>
       </p:sp>
@@ -13898,6 +14633,7 @@
           <a:lstStyle/>
           <a:p>
             <a:pPr algn="ctr"/>
+            <a:endParaRPr/>
           </a:p>
         </p:txBody>
       </p:sp>
@@ -14009,6 +14745,7 @@
           <a:lstStyle/>
           <a:p>
             <a:pPr algn="ctr"/>
+            <a:endParaRPr/>
           </a:p>
         </p:txBody>
       </p:sp>
@@ -14036,7 +14773,7 @@
           <a:p>
             <a:pPr algn="l"/>
             <a:r>
-              <a:rPr sz="1100" b="1">
+              <a:rPr sz="1100" b="1" dirty="0">
                 <a:solidFill>
                   <a:srgbClr val="FFFFFF"/>
                 </a:solidFill>
@@ -14122,6 +14859,7 @@
           <a:lstStyle/>
           <a:p>
             <a:pPr algn="ctr"/>
+            <a:endParaRPr/>
           </a:p>
         </p:txBody>
       </p:sp>
@@ -14199,6 +14937,7 @@
           <a:lstStyle/>
           <a:p>
             <a:pPr algn="ctr"/>
+            <a:endParaRPr/>
           </a:p>
         </p:txBody>
       </p:sp>
@@ -14344,6 +15083,7 @@
           <a:lstStyle/>
           <a:p>
             <a:pPr algn="ctr"/>
+            <a:endParaRPr/>
           </a:p>
         </p:txBody>
       </p:sp>
@@ -14489,6 +15229,7 @@
           <a:lstStyle/>
           <a:p>
             <a:pPr algn="ctr"/>
+            <a:endParaRPr/>
           </a:p>
         </p:txBody>
       </p:sp>
@@ -14634,6 +15375,7 @@
           <a:lstStyle/>
           <a:p>
             <a:pPr algn="ctr"/>
+            <a:endParaRPr/>
           </a:p>
         </p:txBody>
       </p:sp>
@@ -14779,6 +15521,7 @@
           <a:lstStyle/>
           <a:p>
             <a:pPr algn="ctr"/>
+            <a:endParaRPr/>
           </a:p>
         </p:txBody>
       </p:sp>
@@ -14924,6 +15667,7 @@
           <a:lstStyle/>
           <a:p>
             <a:pPr algn="ctr"/>
+            <a:endParaRPr/>
           </a:p>
         </p:txBody>
       </p:sp>
@@ -15069,6 +15813,7 @@
           <a:lstStyle/>
           <a:p>
             <a:pPr algn="ctr"/>
+            <a:endParaRPr/>
           </a:p>
         </p:txBody>
       </p:sp>
@@ -15214,6 +15959,7 @@
           <a:lstStyle/>
           <a:p>
             <a:pPr algn="ctr"/>
+            <a:endParaRPr/>
           </a:p>
         </p:txBody>
       </p:sp>
@@ -15359,6 +16105,7 @@
           <a:lstStyle/>
           <a:p>
             <a:pPr algn="ctr"/>
+            <a:endParaRPr/>
           </a:p>
         </p:txBody>
       </p:sp>
@@ -15439,7 +16186,7 @@
 </file>
 
 <file path=ppt/slides/slide16.xml><?xml version="1.0" encoding="utf-8"?>
-<p:sld xmlns:a="http://schemas.openxmlformats.org/drawingml/2006/main" xmlns:p="http://schemas.openxmlformats.org/presentationml/2006/main" xmlns:r="http://schemas.openxmlformats.org/officeDocument/2006/relationships">
+<p:sld xmlns:a="http://schemas.openxmlformats.org/drawingml/2006/main" xmlns:r="http://schemas.openxmlformats.org/officeDocument/2006/relationships" xmlns:p="http://schemas.openxmlformats.org/presentationml/2006/main">
   <p:cSld>
     <p:spTree>
       <p:nvGrpSpPr>
@@ -15447,7 +16194,14 @@
         <p:cNvGrpSpPr/>
         <p:nvPr/>
       </p:nvGrpSpPr>
-      <p:grpSpPr/>
+      <p:grpSpPr>
+        <a:xfrm>
+          <a:off x="0" y="0"/>
+          <a:ext cx="0" cy="0"/>
+          <a:chOff x="0" y="0"/>
+          <a:chExt cx="0" cy="0"/>
+        </a:xfrm>
+      </p:grpSpPr>
       <p:sp>
         <p:nvSpPr>
           <p:cNvPr id="2" name="Rectangle 1"/>
@@ -15488,6 +16242,7 @@
           <a:lstStyle/>
           <a:p>
             <a:pPr algn="ctr"/>
+            <a:endParaRPr/>
           </a:p>
         </p:txBody>
       </p:sp>
@@ -15531,6 +16286,7 @@
           <a:lstStyle/>
           <a:p>
             <a:pPr algn="ctr"/>
+            <a:endParaRPr/>
           </a:p>
         </p:txBody>
       </p:sp>
@@ -15608,6 +16364,7 @@
           <a:lstStyle/>
           <a:p>
             <a:pPr algn="ctr"/>
+            <a:endParaRPr/>
           </a:p>
         </p:txBody>
       </p:sp>
@@ -15651,6 +16408,7 @@
           <a:lstStyle/>
           <a:p>
             <a:pPr algn="ctr"/>
+            <a:endParaRPr/>
           </a:p>
         </p:txBody>
       </p:sp>
@@ -15762,6 +16520,7 @@
           <a:lstStyle/>
           <a:p>
             <a:pPr algn="ctr"/>
+            <a:endParaRPr/>
           </a:p>
         </p:txBody>
       </p:sp>
@@ -15873,6 +16632,7 @@
           <a:lstStyle/>
           <a:p>
             <a:pPr algn="ctr"/>
+            <a:endParaRPr/>
           </a:p>
         </p:txBody>
       </p:sp>
@@ -15984,6 +16744,7 @@
           <a:lstStyle/>
           <a:p>
             <a:pPr algn="ctr"/>
+            <a:endParaRPr/>
           </a:p>
         </p:txBody>
       </p:sp>
@@ -16095,6 +16856,7 @@
           <a:lstStyle/>
           <a:p>
             <a:pPr algn="ctr"/>
+            <a:endParaRPr/>
           </a:p>
         </p:txBody>
       </p:sp>
@@ -16206,6 +16968,7 @@
           <a:lstStyle/>
           <a:p>
             <a:pPr algn="ctr"/>
+            <a:endParaRPr/>
           </a:p>
         </p:txBody>
       </p:sp>
@@ -16385,6 +17148,7 @@
           <a:lstStyle/>
           <a:p>
             <a:pPr algn="ctr"/>
+            <a:endParaRPr/>
           </a:p>
         </p:txBody>
       </p:sp>
@@ -16465,7 +17229,7 @@
 </file>
 
 <file path=ppt/slides/slide2.xml><?xml version="1.0" encoding="utf-8"?>
-<p:sld xmlns:a="http://schemas.openxmlformats.org/drawingml/2006/main" xmlns:p="http://schemas.openxmlformats.org/presentationml/2006/main" xmlns:r="http://schemas.openxmlformats.org/officeDocument/2006/relationships">
+<p:sld xmlns:a="http://schemas.openxmlformats.org/drawingml/2006/main" xmlns:r="http://schemas.openxmlformats.org/officeDocument/2006/relationships" xmlns:p="http://schemas.openxmlformats.org/presentationml/2006/main">
   <p:cSld>
     <p:spTree>
       <p:nvGrpSpPr>
@@ -16473,7 +17237,14 @@
         <p:cNvGrpSpPr/>
         <p:nvPr/>
       </p:nvGrpSpPr>
-      <p:grpSpPr/>
+      <p:grpSpPr>
+        <a:xfrm>
+          <a:off x="0" y="0"/>
+          <a:ext cx="0" cy="0"/>
+          <a:chOff x="0" y="0"/>
+          <a:chExt cx="0" cy="0"/>
+        </a:xfrm>
+      </p:grpSpPr>
       <p:sp>
         <p:nvSpPr>
           <p:cNvPr id="2" name="Rectangle 1"/>
@@ -16514,6 +17285,7 @@
           <a:lstStyle/>
           <a:p>
             <a:pPr algn="ctr"/>
+            <a:endParaRPr/>
           </a:p>
         </p:txBody>
       </p:sp>
@@ -16557,6 +17329,7 @@
           <a:lstStyle/>
           <a:p>
             <a:pPr algn="ctr"/>
+            <a:endParaRPr/>
           </a:p>
         </p:txBody>
       </p:sp>
@@ -16670,6 +17443,7 @@
           <a:lstStyle/>
           <a:p>
             <a:pPr algn="ctr"/>
+            <a:endParaRPr/>
           </a:p>
         </p:txBody>
       </p:sp>
@@ -16862,6 +17636,7 @@
           <a:lstStyle/>
           <a:p>
             <a:pPr algn="ctr"/>
+            <a:endParaRPr/>
           </a:p>
         </p:txBody>
       </p:sp>
@@ -17086,6 +17861,7 @@
           <a:lstStyle/>
           <a:p>
             <a:pPr algn="ctr"/>
+            <a:endParaRPr/>
           </a:p>
         </p:txBody>
       </p:sp>
@@ -17166,7 +17942,7 @@
 </file>
 
 <file path=ppt/slides/slide3.xml><?xml version="1.0" encoding="utf-8"?>
-<p:sld xmlns:a="http://schemas.openxmlformats.org/drawingml/2006/main" xmlns:p="http://schemas.openxmlformats.org/presentationml/2006/main" xmlns:r="http://schemas.openxmlformats.org/officeDocument/2006/relationships">
+<p:sld xmlns:a="http://schemas.openxmlformats.org/drawingml/2006/main" xmlns:r="http://schemas.openxmlformats.org/officeDocument/2006/relationships" xmlns:p="http://schemas.openxmlformats.org/presentationml/2006/main">
   <p:cSld>
     <p:spTree>
       <p:nvGrpSpPr>
@@ -17174,7 +17950,14 @@
         <p:cNvGrpSpPr/>
         <p:nvPr/>
       </p:nvGrpSpPr>
-      <p:grpSpPr/>
+      <p:grpSpPr>
+        <a:xfrm>
+          <a:off x="0" y="0"/>
+          <a:ext cx="0" cy="0"/>
+          <a:chOff x="0" y="0"/>
+          <a:chExt cx="0" cy="0"/>
+        </a:xfrm>
+      </p:grpSpPr>
       <p:sp>
         <p:nvSpPr>
           <p:cNvPr id="2" name="Rectangle 1"/>
@@ -17215,6 +17998,7 @@
           <a:lstStyle/>
           <a:p>
             <a:pPr algn="ctr"/>
+            <a:endParaRPr/>
           </a:p>
         </p:txBody>
       </p:sp>
@@ -17258,6 +18042,7 @@
           <a:lstStyle/>
           <a:p>
             <a:pPr algn="ctr"/>
+            <a:endParaRPr/>
           </a:p>
         </p:txBody>
       </p:sp>
@@ -17369,6 +18154,7 @@
           <a:lstStyle/>
           <a:p>
             <a:pPr algn="ctr"/>
+            <a:endParaRPr/>
           </a:p>
         </p:txBody>
       </p:sp>
@@ -17481,6 +18267,7 @@
           <a:lstStyle/>
           <a:p>
             <a:pPr algn="ctr"/>
+            <a:endParaRPr/>
           </a:p>
         </p:txBody>
       </p:sp>
@@ -17593,6 +18380,7 @@
           <a:lstStyle/>
           <a:p>
             <a:pPr algn="ctr"/>
+            <a:endParaRPr/>
           </a:p>
         </p:txBody>
       </p:sp>
@@ -17705,6 +18493,7 @@
           <a:lstStyle/>
           <a:p>
             <a:pPr algn="ctr"/>
+            <a:endParaRPr/>
           </a:p>
         </p:txBody>
       </p:sp>
@@ -17817,6 +18606,7 @@
           <a:lstStyle/>
           <a:p>
             <a:pPr algn="ctr"/>
+            <a:endParaRPr/>
           </a:p>
         </p:txBody>
       </p:sp>
@@ -17929,6 +18719,7 @@
           <a:lstStyle/>
           <a:p>
             <a:pPr algn="ctr"/>
+            <a:endParaRPr/>
           </a:p>
         </p:txBody>
       </p:sp>
@@ -18043,6 +18834,7 @@
           <a:lstStyle/>
           <a:p>
             <a:pPr algn="ctr"/>
+            <a:endParaRPr/>
           </a:p>
         </p:txBody>
       </p:sp>
@@ -18120,6 +18912,7 @@
           <a:lstStyle/>
           <a:p>
             <a:pPr algn="ctr"/>
+            <a:endParaRPr/>
           </a:p>
         </p:txBody>
       </p:sp>
@@ -18200,7 +18993,7 @@
 </file>
 
 <file path=ppt/slides/slide4.xml><?xml version="1.0" encoding="utf-8"?>
-<p:sld xmlns:a="http://schemas.openxmlformats.org/drawingml/2006/main" xmlns:p="http://schemas.openxmlformats.org/presentationml/2006/main" xmlns:r="http://schemas.openxmlformats.org/officeDocument/2006/relationships">
+<p:sld xmlns:a="http://schemas.openxmlformats.org/drawingml/2006/main" xmlns:r="http://schemas.openxmlformats.org/officeDocument/2006/relationships" xmlns:p="http://schemas.openxmlformats.org/presentationml/2006/main">
   <p:cSld>
     <p:spTree>
       <p:nvGrpSpPr>
@@ -18208,7 +19001,14 @@
         <p:cNvGrpSpPr/>
         <p:nvPr/>
       </p:nvGrpSpPr>
-      <p:grpSpPr/>
+      <p:grpSpPr>
+        <a:xfrm>
+          <a:off x="0" y="0"/>
+          <a:ext cx="0" cy="0"/>
+          <a:chOff x="0" y="0"/>
+          <a:chExt cx="0" cy="0"/>
+        </a:xfrm>
+      </p:grpSpPr>
       <p:sp>
         <p:nvSpPr>
           <p:cNvPr id="2" name="Rectangle 1"/>
@@ -18249,6 +19049,7 @@
           <a:lstStyle/>
           <a:p>
             <a:pPr algn="ctr"/>
+            <a:endParaRPr/>
           </a:p>
         </p:txBody>
       </p:sp>
@@ -18292,6 +19093,7 @@
           <a:lstStyle/>
           <a:p>
             <a:pPr algn="ctr"/>
+            <a:endParaRPr/>
           </a:p>
         </p:txBody>
       </p:sp>
@@ -18403,6 +19205,7 @@
           <a:lstStyle/>
           <a:p>
             <a:pPr algn="ctr"/>
+            <a:endParaRPr/>
           </a:p>
         </p:txBody>
       </p:sp>
@@ -18514,6 +19317,7 @@
           <a:lstStyle/>
           <a:p>
             <a:pPr algn="ctr"/>
+            <a:endParaRPr/>
           </a:p>
         </p:txBody>
       </p:sp>
@@ -18627,6 +19431,7 @@
           <a:lstStyle/>
           <a:p>
             <a:pPr algn="ctr"/>
+            <a:endParaRPr/>
           </a:p>
         </p:txBody>
       </p:sp>
@@ -18670,6 +19475,7 @@
           <a:lstStyle/>
           <a:p>
             <a:pPr algn="ctr"/>
+            <a:endParaRPr/>
           </a:p>
         </p:txBody>
       </p:sp>
@@ -18784,6 +19590,7 @@
           <a:lstStyle/>
           <a:p>
             <a:pPr algn="ctr"/>
+            <a:endParaRPr/>
           </a:p>
         </p:txBody>
       </p:sp>
@@ -18827,6 +19634,7 @@
           <a:lstStyle/>
           <a:p>
             <a:pPr algn="ctr"/>
+            <a:endParaRPr/>
           </a:p>
         </p:txBody>
       </p:sp>
@@ -18941,6 +19749,7 @@
           <a:lstStyle/>
           <a:p>
             <a:pPr algn="ctr"/>
+            <a:endParaRPr/>
           </a:p>
         </p:txBody>
       </p:sp>
@@ -18984,6 +19793,7 @@
           <a:lstStyle/>
           <a:p>
             <a:pPr algn="ctr"/>
+            <a:endParaRPr/>
           </a:p>
         </p:txBody>
       </p:sp>
@@ -19097,6 +19907,7 @@
           <a:lstStyle/>
           <a:p>
             <a:pPr algn="ctr"/>
+            <a:endParaRPr/>
           </a:p>
         </p:txBody>
       </p:sp>
@@ -19210,7 +20021,7 @@
         </p:nvSpPr>
         <p:spPr>
           <a:xfrm>
-            <a:off x="228600" y="2423160"/>
+            <a:off x="1063371" y="1348740"/>
             <a:ext cx="2011680" cy="777240"/>
           </a:xfrm>
           <a:prstGeom prst="roundRect">
@@ -19242,6 +20053,7 @@
           <a:lstStyle/>
           <a:p>
             <a:pPr algn="ctr"/>
+            <a:endParaRPr/>
           </a:p>
         </p:txBody>
       </p:sp>
@@ -19253,7 +20065,7 @@
         </p:nvSpPr>
         <p:spPr>
           <a:xfrm>
-            <a:off x="274320" y="2468880"/>
+            <a:off x="1063371" y="1556143"/>
             <a:ext cx="1920240" cy="685800"/>
           </a:xfrm>
           <a:prstGeom prst="rect">
@@ -19269,12 +20081,20 @@
           <a:p>
             <a:pPr algn="ctr"/>
             <a:r>
-              <a:rPr sz="1000" b="1">
+              <a:rPr sz="1000" b="1" dirty="0" err="1">
                 <a:solidFill>
                   <a:srgbClr val="FFFFFF"/>
                 </a:solidFill>
               </a:rPr>
-              <a:t>qTest Manager
+              <a:t>qTest</a:t>
+            </a:r>
+            <a:r>
+              <a:rPr sz="1000" b="1" dirty="0">
+                <a:solidFill>
+                  <a:srgbClr val="FFFFFF"/>
+                </a:solidFill>
+              </a:rPr>
+              <a:t> Manager
 (Dell ESG)</a:t>
             </a:r>
           </a:p>
@@ -19320,6 +20140,7 @@
           <a:lstStyle/>
           <a:p>
             <a:pPr algn="ctr"/>
+            <a:endParaRPr/>
           </a:p>
         </p:txBody>
       </p:sp>
@@ -19366,7 +20187,7 @@
         </p:nvSpPr>
         <p:spPr>
           <a:xfrm>
-            <a:off x="9692640" y="2423160"/>
+            <a:off x="9262745" y="1341259"/>
             <a:ext cx="2011680" cy="777240"/>
           </a:xfrm>
           <a:prstGeom prst="roundRect">
@@ -19398,6 +20219,7 @@
           <a:lstStyle/>
           <a:p>
             <a:pPr algn="ctr"/>
+            <a:endParaRPr dirty="0"/>
           </a:p>
         </p:txBody>
       </p:sp>
@@ -19409,7 +20231,7 @@
         </p:nvSpPr>
         <p:spPr>
           <a:xfrm>
-            <a:off x="9738360" y="2468880"/>
+            <a:off x="9354185" y="1556143"/>
             <a:ext cx="1920240" cy="685800"/>
           </a:xfrm>
           <a:prstGeom prst="rect">
@@ -19425,7 +20247,7 @@
           <a:p>
             <a:pPr algn="ctr"/>
             <a:r>
-              <a:rPr sz="1000" b="1">
+              <a:rPr sz="1000" b="1" dirty="0">
                 <a:solidFill>
                   <a:srgbClr val="FFFFFF"/>
                 </a:solidFill>
@@ -19476,6 +20298,7 @@
           <a:lstStyle/>
           <a:p>
             <a:pPr algn="ctr"/>
+            <a:endParaRPr/>
           </a:p>
         </p:txBody>
       </p:sp>
@@ -19622,6 +20445,7 @@
           <a:lstStyle/>
           <a:p>
             <a:pPr algn="ctr"/>
+            <a:endParaRPr/>
           </a:p>
         </p:txBody>
       </p:sp>
@@ -19700,6 +20524,7 @@
           <a:lstStyle/>
           <a:p>
             <a:pPr algn="ctr"/>
+            <a:endParaRPr/>
           </a:p>
         </p:txBody>
       </p:sp>
@@ -19778,6 +20603,7 @@
           <a:lstStyle/>
           <a:p>
             <a:pPr algn="ctr"/>
+            <a:endParaRPr/>
           </a:p>
         </p:txBody>
       </p:sp>
@@ -19856,6 +20682,7 @@
           <a:lstStyle/>
           <a:p>
             <a:pPr algn="ctr"/>
+            <a:endParaRPr/>
           </a:p>
         </p:txBody>
       </p:sp>
@@ -19934,6 +20761,7 @@
           <a:lstStyle/>
           <a:p>
             <a:pPr algn="ctr"/>
+            <a:endParaRPr/>
           </a:p>
         </p:txBody>
       </p:sp>
@@ -20014,7 +20842,7 @@
 </file>
 
 <file path=ppt/slides/slide5.xml><?xml version="1.0" encoding="utf-8"?>
-<p:sld xmlns:a="http://schemas.openxmlformats.org/drawingml/2006/main" xmlns:p="http://schemas.openxmlformats.org/presentationml/2006/main" xmlns:r="http://schemas.openxmlformats.org/officeDocument/2006/relationships">
+<p:sld xmlns:a="http://schemas.openxmlformats.org/drawingml/2006/main" xmlns:r="http://schemas.openxmlformats.org/officeDocument/2006/relationships" xmlns:p="http://schemas.openxmlformats.org/presentationml/2006/main">
   <p:cSld>
     <p:spTree>
       <p:nvGrpSpPr>
@@ -20022,7 +20850,14 @@
         <p:cNvGrpSpPr/>
         <p:nvPr/>
       </p:nvGrpSpPr>
-      <p:grpSpPr/>
+      <p:grpSpPr>
+        <a:xfrm>
+          <a:off x="0" y="0"/>
+          <a:ext cx="0" cy="0"/>
+          <a:chOff x="0" y="0"/>
+          <a:chExt cx="0" cy="0"/>
+        </a:xfrm>
+      </p:grpSpPr>
       <p:sp>
         <p:nvSpPr>
           <p:cNvPr id="2" name="Rectangle 1"/>
@@ -20063,6 +20898,7 @@
           <a:lstStyle/>
           <a:p>
             <a:pPr algn="ctr"/>
+            <a:endParaRPr/>
           </a:p>
         </p:txBody>
       </p:sp>
@@ -20106,6 +20942,7 @@
           <a:lstStyle/>
           <a:p>
             <a:pPr algn="ctr"/>
+            <a:endParaRPr/>
           </a:p>
         </p:txBody>
       </p:sp>
@@ -20217,6 +21054,7 @@
           <a:lstStyle/>
           <a:p>
             <a:pPr algn="ctr"/>
+            <a:endParaRPr/>
           </a:p>
         </p:txBody>
       </p:sp>
@@ -20397,6 +21235,7 @@
           <a:lstStyle/>
           <a:p>
             <a:pPr algn="ctr"/>
+            <a:endParaRPr/>
           </a:p>
         </p:txBody>
       </p:sp>
@@ -20577,6 +21416,7 @@
           <a:lstStyle/>
           <a:p>
             <a:pPr algn="ctr"/>
+            <a:endParaRPr/>
           </a:p>
         </p:txBody>
       </p:sp>
@@ -20757,6 +21597,7 @@
           <a:lstStyle/>
           <a:p>
             <a:pPr algn="ctr"/>
+            <a:endParaRPr/>
           </a:p>
         </p:txBody>
       </p:sp>
@@ -20937,6 +21778,7 @@
           <a:lstStyle/>
           <a:p>
             <a:pPr algn="ctr"/>
+            <a:endParaRPr/>
           </a:p>
         </p:txBody>
       </p:sp>
@@ -21084,6 +21926,7 @@
           <a:lstStyle/>
           <a:p>
             <a:pPr algn="ctr"/>
+            <a:endParaRPr/>
           </a:p>
         </p:txBody>
       </p:sp>
@@ -21163,6 +22006,7 @@
           <a:lstStyle/>
           <a:p>
             <a:pPr algn="ctr"/>
+            <a:endParaRPr/>
           </a:p>
         </p:txBody>
       </p:sp>
@@ -21276,6 +22120,7 @@
           <a:lstStyle/>
           <a:p>
             <a:pPr algn="ctr"/>
+            <a:endParaRPr/>
           </a:p>
         </p:txBody>
       </p:sp>
@@ -21389,6 +22234,7 @@
           <a:lstStyle/>
           <a:p>
             <a:pPr algn="ctr"/>
+            <a:endParaRPr/>
           </a:p>
         </p:txBody>
       </p:sp>
@@ -21502,6 +22348,7 @@
           <a:lstStyle/>
           <a:p>
             <a:pPr algn="ctr"/>
+            <a:endParaRPr/>
           </a:p>
         </p:txBody>
       </p:sp>
@@ -21615,6 +22462,7 @@
           <a:lstStyle/>
           <a:p>
             <a:pPr algn="ctr"/>
+            <a:endParaRPr/>
           </a:p>
         </p:txBody>
       </p:sp>
@@ -21728,6 +22576,7 @@
           <a:lstStyle/>
           <a:p>
             <a:pPr algn="ctr"/>
+            <a:endParaRPr/>
           </a:p>
         </p:txBody>
       </p:sp>
@@ -21839,6 +22688,7 @@
           <a:lstStyle/>
           <a:p>
             <a:pPr algn="ctr"/>
+            <a:endParaRPr/>
           </a:p>
         </p:txBody>
       </p:sp>
@@ -21919,7 +22769,7 @@
 </file>
 
 <file path=ppt/slides/slide6.xml><?xml version="1.0" encoding="utf-8"?>
-<p:sld xmlns:a="http://schemas.openxmlformats.org/drawingml/2006/main" xmlns:p="http://schemas.openxmlformats.org/presentationml/2006/main" xmlns:r="http://schemas.openxmlformats.org/officeDocument/2006/relationships">
+<p:sld xmlns:a="http://schemas.openxmlformats.org/drawingml/2006/main" xmlns:r="http://schemas.openxmlformats.org/officeDocument/2006/relationships" xmlns:p="http://schemas.openxmlformats.org/presentationml/2006/main">
   <p:cSld>
     <p:spTree>
       <p:nvGrpSpPr>
@@ -21927,7 +22777,14 @@
         <p:cNvGrpSpPr/>
         <p:nvPr/>
       </p:nvGrpSpPr>
-      <p:grpSpPr/>
+      <p:grpSpPr>
+        <a:xfrm>
+          <a:off x="0" y="0"/>
+          <a:ext cx="0" cy="0"/>
+          <a:chOff x="0" y="0"/>
+          <a:chExt cx="0" cy="0"/>
+        </a:xfrm>
+      </p:grpSpPr>
       <p:sp>
         <p:nvSpPr>
           <p:cNvPr id="2" name="Rectangle 1"/>
@@ -21968,6 +22825,7 @@
           <a:lstStyle/>
           <a:p>
             <a:pPr algn="ctr"/>
+            <a:endParaRPr/>
           </a:p>
         </p:txBody>
       </p:sp>
@@ -22011,6 +22869,7 @@
           <a:lstStyle/>
           <a:p>
             <a:pPr algn="ctr"/>
+            <a:endParaRPr/>
           </a:p>
         </p:txBody>
       </p:sp>
@@ -22124,6 +22983,7 @@
           <a:lstStyle/>
           <a:p>
             <a:pPr algn="ctr"/>
+            <a:endParaRPr/>
           </a:p>
         </p:txBody>
       </p:sp>
@@ -22316,6 +23176,7 @@
           <a:lstStyle/>
           <a:p>
             <a:pPr algn="ctr"/>
+            <a:endParaRPr/>
           </a:p>
         </p:txBody>
       </p:sp>
@@ -22508,6 +23369,7 @@
           <a:lstStyle/>
           <a:p>
             <a:pPr algn="ctr"/>
+            <a:endParaRPr/>
           </a:p>
         </p:txBody>
       </p:sp>
@@ -22732,6 +23594,7 @@
           <a:lstStyle/>
           <a:p>
             <a:pPr algn="ctr"/>
+            <a:endParaRPr/>
           </a:p>
         </p:txBody>
       </p:sp>
@@ -22843,6 +23706,7 @@
           <a:lstStyle/>
           <a:p>
             <a:pPr algn="ctr"/>
+            <a:endParaRPr/>
           </a:p>
         </p:txBody>
       </p:sp>
@@ -22955,6 +23819,7 @@
           <a:lstStyle/>
           <a:p>
             <a:pPr algn="ctr"/>
+            <a:endParaRPr/>
           </a:p>
         </p:txBody>
       </p:sp>
@@ -23067,6 +23932,7 @@
           <a:lstStyle/>
           <a:p>
             <a:pPr algn="ctr"/>
+            <a:endParaRPr/>
           </a:p>
         </p:txBody>
       </p:sp>
@@ -23179,6 +24045,7 @@
           <a:lstStyle/>
           <a:p>
             <a:pPr algn="ctr"/>
+            <a:endParaRPr/>
           </a:p>
         </p:txBody>
       </p:sp>
@@ -23291,6 +24158,7 @@
           <a:lstStyle/>
           <a:p>
             <a:pPr algn="ctr"/>
+            <a:endParaRPr/>
           </a:p>
         </p:txBody>
       </p:sp>
@@ -23371,6 +24239,7 @@
           <a:lstStyle/>
           <a:p>
             <a:pPr algn="ctr"/>
+            <a:endParaRPr/>
           </a:p>
         </p:txBody>
       </p:sp>
@@ -23448,6 +24317,7 @@
           <a:lstStyle/>
           <a:p>
             <a:pPr algn="ctr"/>
+            <a:endParaRPr/>
           </a:p>
         </p:txBody>
       </p:sp>
@@ -23528,7 +24398,7 @@
 </file>
 
 <file path=ppt/slides/slide7.xml><?xml version="1.0" encoding="utf-8"?>
-<p:sld xmlns:a="http://schemas.openxmlformats.org/drawingml/2006/main" xmlns:p="http://schemas.openxmlformats.org/presentationml/2006/main" xmlns:r="http://schemas.openxmlformats.org/officeDocument/2006/relationships">
+<p:sld xmlns:a="http://schemas.openxmlformats.org/drawingml/2006/main" xmlns:r="http://schemas.openxmlformats.org/officeDocument/2006/relationships" xmlns:p="http://schemas.openxmlformats.org/presentationml/2006/main">
   <p:cSld>
     <p:spTree>
       <p:nvGrpSpPr>
@@ -23536,7 +24406,14 @@
         <p:cNvGrpSpPr/>
         <p:nvPr/>
       </p:nvGrpSpPr>
-      <p:grpSpPr/>
+      <p:grpSpPr>
+        <a:xfrm>
+          <a:off x="0" y="0"/>
+          <a:ext cx="0" cy="0"/>
+          <a:chOff x="0" y="0"/>
+          <a:chExt cx="0" cy="0"/>
+        </a:xfrm>
+      </p:grpSpPr>
       <p:sp>
         <p:nvSpPr>
           <p:cNvPr id="2" name="Rectangle 1"/>
@@ -23577,6 +24454,7 @@
           <a:lstStyle/>
           <a:p>
             <a:pPr algn="ctr"/>
+            <a:endParaRPr/>
           </a:p>
         </p:txBody>
       </p:sp>
@@ -23620,6 +24498,7 @@
           <a:lstStyle/>
           <a:p>
             <a:pPr algn="ctr"/>
+            <a:endParaRPr/>
           </a:p>
         </p:txBody>
       </p:sp>
@@ -23731,6 +24610,7 @@
           <a:lstStyle/>
           <a:p>
             <a:pPr algn="ctr"/>
+            <a:endParaRPr/>
           </a:p>
         </p:txBody>
       </p:sp>
@@ -23878,6 +24758,7 @@
           <a:lstStyle/>
           <a:p>
             <a:pPr algn="ctr"/>
+            <a:endParaRPr/>
           </a:p>
         </p:txBody>
       </p:sp>
@@ -24025,6 +24906,7 @@
           <a:lstStyle/>
           <a:p>
             <a:pPr algn="ctr"/>
+            <a:endParaRPr/>
           </a:p>
         </p:txBody>
       </p:sp>
@@ -24172,6 +25054,7 @@
           <a:lstStyle/>
           <a:p>
             <a:pPr algn="ctr"/>
+            <a:endParaRPr/>
           </a:p>
         </p:txBody>
       </p:sp>
@@ -24319,6 +25202,7 @@
           <a:lstStyle/>
           <a:p>
             <a:pPr algn="ctr"/>
+            <a:endParaRPr/>
           </a:p>
         </p:txBody>
       </p:sp>
@@ -24466,6 +25350,7 @@
           <a:lstStyle/>
           <a:p>
             <a:pPr algn="ctr"/>
+            <a:endParaRPr/>
           </a:p>
         </p:txBody>
       </p:sp>
@@ -24559,6 +25444,7 @@
           <a:lstStyle/>
           <a:p>
             <a:pPr algn="ctr"/>
+            <a:endParaRPr/>
           </a:p>
         </p:txBody>
       </p:sp>
@@ -24747,6 +25633,7 @@
           <a:lstStyle/>
           <a:p>
             <a:pPr algn="ctr"/>
+            <a:endParaRPr/>
           </a:p>
         </p:txBody>
       </p:sp>
@@ -24827,7 +25714,7 @@
 </file>
 
 <file path=ppt/slides/slide8.xml><?xml version="1.0" encoding="utf-8"?>
-<p:sld xmlns:a="http://schemas.openxmlformats.org/drawingml/2006/main" xmlns:p="http://schemas.openxmlformats.org/presentationml/2006/main" xmlns:r="http://schemas.openxmlformats.org/officeDocument/2006/relationships">
+<p:sld xmlns:a="http://schemas.openxmlformats.org/drawingml/2006/main" xmlns:r="http://schemas.openxmlformats.org/officeDocument/2006/relationships" xmlns:p="http://schemas.openxmlformats.org/presentationml/2006/main">
   <p:cSld>
     <p:spTree>
       <p:nvGrpSpPr>
@@ -24835,7 +25722,14 @@
         <p:cNvGrpSpPr/>
         <p:nvPr/>
       </p:nvGrpSpPr>
-      <p:grpSpPr/>
+      <p:grpSpPr>
+        <a:xfrm>
+          <a:off x="0" y="0"/>
+          <a:ext cx="0" cy="0"/>
+          <a:chOff x="0" y="0"/>
+          <a:chExt cx="0" cy="0"/>
+        </a:xfrm>
+      </p:grpSpPr>
       <p:sp>
         <p:nvSpPr>
           <p:cNvPr id="2" name="Rectangle 1"/>
@@ -24876,6 +25770,7 @@
           <a:lstStyle/>
           <a:p>
             <a:pPr algn="ctr"/>
+            <a:endParaRPr/>
           </a:p>
         </p:txBody>
       </p:sp>
@@ -24919,6 +25814,7 @@
           <a:lstStyle/>
           <a:p>
             <a:pPr algn="ctr"/>
+            <a:endParaRPr/>
           </a:p>
         </p:txBody>
       </p:sp>
@@ -25032,6 +25928,7 @@
           <a:lstStyle/>
           <a:p>
             <a:pPr algn="ctr"/>
+            <a:endParaRPr/>
           </a:p>
         </p:txBody>
       </p:sp>
@@ -25109,6 +26006,7 @@
           <a:lstStyle/>
           <a:p>
             <a:pPr algn="ctr"/>
+            <a:endParaRPr/>
           </a:p>
         </p:txBody>
       </p:sp>
@@ -25221,6 +26119,7 @@
           <a:lstStyle/>
           <a:p>
             <a:pPr algn="ctr"/>
+            <a:endParaRPr/>
           </a:p>
         </p:txBody>
       </p:sp>
@@ -25332,6 +26231,7 @@
           <a:lstStyle/>
           <a:p>
             <a:pPr algn="ctr"/>
+            <a:endParaRPr/>
           </a:p>
         </p:txBody>
       </p:sp>
@@ -25444,6 +26344,7 @@
           <a:lstStyle/>
           <a:p>
             <a:pPr algn="ctr"/>
+            <a:endParaRPr/>
           </a:p>
         </p:txBody>
       </p:sp>
@@ -25522,6 +26423,7 @@
           <a:lstStyle/>
           <a:p>
             <a:pPr algn="ctr"/>
+            <a:endParaRPr/>
           </a:p>
         </p:txBody>
       </p:sp>
@@ -25633,6 +26535,7 @@
           <a:lstStyle/>
           <a:p>
             <a:pPr algn="ctr"/>
+            <a:endParaRPr/>
           </a:p>
         </p:txBody>
       </p:sp>
@@ -25812,6 +26715,7 @@
           <a:lstStyle/>
           <a:p>
             <a:pPr algn="ctr"/>
+            <a:endParaRPr/>
           </a:p>
         </p:txBody>
       </p:sp>
@@ -25991,6 +26895,7 @@
           <a:lstStyle/>
           <a:p>
             <a:pPr algn="ctr"/>
+            <a:endParaRPr/>
           </a:p>
         </p:txBody>
       </p:sp>
@@ -26034,6 +26939,7 @@
           <a:lstStyle/>
           <a:p>
             <a:pPr algn="ctr"/>
+            <a:endParaRPr/>
           </a:p>
         </p:txBody>
       </p:sp>
@@ -26213,6 +27119,7 @@
           <a:lstStyle/>
           <a:p>
             <a:pPr algn="ctr"/>
+            <a:endParaRPr/>
           </a:p>
         </p:txBody>
       </p:sp>
@@ -26256,6 +27163,7 @@
           <a:lstStyle/>
           <a:p>
             <a:pPr algn="ctr"/>
+            <a:endParaRPr/>
           </a:p>
         </p:txBody>
       </p:sp>
@@ -26435,6 +27343,7 @@
           <a:lstStyle/>
           <a:p>
             <a:pPr algn="ctr"/>
+            <a:endParaRPr/>
           </a:p>
         </p:txBody>
       </p:sp>
@@ -26478,6 +27387,7 @@
           <a:lstStyle/>
           <a:p>
             <a:pPr algn="ctr"/>
+            <a:endParaRPr/>
           </a:p>
         </p:txBody>
       </p:sp>
@@ -26657,6 +27567,7 @@
           <a:lstStyle/>
           <a:p>
             <a:pPr algn="ctr"/>
+            <a:endParaRPr/>
           </a:p>
         </p:txBody>
       </p:sp>
@@ -26700,6 +27611,7 @@
           <a:lstStyle/>
           <a:p>
             <a:pPr algn="ctr"/>
+            <a:endParaRPr/>
           </a:p>
         </p:txBody>
       </p:sp>
@@ -26879,6 +27791,7 @@
           <a:lstStyle/>
           <a:p>
             <a:pPr algn="ctr"/>
+            <a:endParaRPr/>
           </a:p>
         </p:txBody>
       </p:sp>
@@ -26922,6 +27835,7 @@
           <a:lstStyle/>
           <a:p>
             <a:pPr algn="ctr"/>
+            <a:endParaRPr/>
           </a:p>
         </p:txBody>
       </p:sp>
@@ -27101,6 +28015,7 @@
           <a:lstStyle/>
           <a:p>
             <a:pPr algn="ctr"/>
+            <a:endParaRPr/>
           </a:p>
         </p:txBody>
       </p:sp>
@@ -27144,6 +28059,7 @@
           <a:lstStyle/>
           <a:p>
             <a:pPr algn="ctr"/>
+            <a:endParaRPr/>
           </a:p>
         </p:txBody>
       </p:sp>
@@ -27323,6 +28239,7 @@
           <a:lstStyle/>
           <a:p>
             <a:pPr algn="ctr"/>
+            <a:endParaRPr/>
           </a:p>
         </p:txBody>
       </p:sp>
@@ -27366,6 +28283,7 @@
           <a:lstStyle/>
           <a:p>
             <a:pPr algn="ctr"/>
+            <a:endParaRPr/>
           </a:p>
         </p:txBody>
       </p:sp>
@@ -27545,6 +28463,7 @@
           <a:lstStyle/>
           <a:p>
             <a:pPr algn="ctr"/>
+            <a:endParaRPr/>
           </a:p>
         </p:txBody>
       </p:sp>
@@ -27588,6 +28507,7 @@
           <a:lstStyle/>
           <a:p>
             <a:pPr algn="ctr"/>
+            <a:endParaRPr/>
           </a:p>
         </p:txBody>
       </p:sp>
@@ -27767,6 +28687,7 @@
           <a:lstStyle/>
           <a:p>
             <a:pPr algn="ctr"/>
+            <a:endParaRPr/>
           </a:p>
         </p:txBody>
       </p:sp>
@@ -27810,6 +28731,7 @@
           <a:lstStyle/>
           <a:p>
             <a:pPr algn="ctr"/>
+            <a:endParaRPr/>
           </a:p>
         </p:txBody>
       </p:sp>
@@ -27890,7 +28812,7 @@
 </file>
 
 <file path=ppt/slides/slide9.xml><?xml version="1.0" encoding="utf-8"?>
-<p:sld xmlns:a="http://schemas.openxmlformats.org/drawingml/2006/main" xmlns:p="http://schemas.openxmlformats.org/presentationml/2006/main" xmlns:r="http://schemas.openxmlformats.org/officeDocument/2006/relationships">
+<p:sld xmlns:a="http://schemas.openxmlformats.org/drawingml/2006/main" xmlns:r="http://schemas.openxmlformats.org/officeDocument/2006/relationships" xmlns:p="http://schemas.openxmlformats.org/presentationml/2006/main">
   <p:cSld>
     <p:spTree>
       <p:nvGrpSpPr>
@@ -27898,7 +28820,14 @@
         <p:cNvGrpSpPr/>
         <p:nvPr/>
       </p:nvGrpSpPr>
-      <p:grpSpPr/>
+      <p:grpSpPr>
+        <a:xfrm>
+          <a:off x="0" y="0"/>
+          <a:ext cx="0" cy="0"/>
+          <a:chOff x="0" y="0"/>
+          <a:chExt cx="0" cy="0"/>
+        </a:xfrm>
+      </p:grpSpPr>
       <p:sp>
         <p:nvSpPr>
           <p:cNvPr id="2" name="Rectangle 1"/>
@@ -27939,6 +28868,7 @@
           <a:lstStyle/>
           <a:p>
             <a:pPr algn="ctr"/>
+            <a:endParaRPr/>
           </a:p>
         </p:txBody>
       </p:sp>
@@ -27982,6 +28912,7 @@
           <a:lstStyle/>
           <a:p>
             <a:pPr algn="ctr"/>
+            <a:endParaRPr/>
           </a:p>
         </p:txBody>
       </p:sp>
@@ -28095,6 +29026,7 @@
           <a:lstStyle/>
           <a:p>
             <a:pPr algn="ctr"/>
+            <a:endParaRPr/>
           </a:p>
         </p:txBody>
       </p:sp>
@@ -28174,6 +29106,7 @@
           <a:lstStyle/>
           <a:p>
             <a:pPr algn="ctr"/>
+            <a:endParaRPr/>
           </a:p>
         </p:txBody>
       </p:sp>
@@ -28287,6 +29220,7 @@
           <a:lstStyle/>
           <a:p>
             <a:pPr algn="ctr"/>
+            <a:endParaRPr/>
           </a:p>
         </p:txBody>
       </p:sp>
@@ -28400,6 +29334,7 @@
           <a:lstStyle/>
           <a:p>
             <a:pPr algn="ctr"/>
+            <a:endParaRPr/>
           </a:p>
         </p:txBody>
       </p:sp>
@@ -28513,6 +29448,7 @@
           <a:lstStyle/>
           <a:p>
             <a:pPr algn="ctr"/>
+            <a:endParaRPr/>
           </a:p>
         </p:txBody>
       </p:sp>
@@ -28626,6 +29562,7 @@
           <a:lstStyle/>
           <a:p>
             <a:pPr algn="ctr"/>
+            <a:endParaRPr/>
           </a:p>
         </p:txBody>
       </p:sp>
@@ -28739,6 +29676,7 @@
           <a:lstStyle/>
           <a:p>
             <a:pPr algn="ctr"/>
+            <a:endParaRPr/>
           </a:p>
         </p:txBody>
       </p:sp>
@@ -28818,6 +29756,7 @@
           <a:lstStyle/>
           <a:p>
             <a:pPr algn="ctr"/>
+            <a:endParaRPr/>
           </a:p>
         </p:txBody>
       </p:sp>
@@ -28897,6 +29836,7 @@
           <a:lstStyle/>
           <a:p>
             <a:pPr algn="ctr"/>
+            <a:endParaRPr/>
           </a:p>
         </p:txBody>
       </p:sp>
@@ -28976,6 +29916,7 @@
           <a:lstStyle/>
           <a:p>
             <a:pPr algn="ctr"/>
+            <a:endParaRPr/>
           </a:p>
         </p:txBody>
       </p:sp>
@@ -29003,7 +29944,7 @@
           <a:p>
             <a:pPr algn="ctr"/>
             <a:r>
-              <a:rPr sz="1100" b="0" i="1">
+              <a:rPr sz="1100" b="0" i="1" dirty="0">
                 <a:solidFill>
                   <a:srgbClr val="647487"/>
                 </a:solidFill>
@@ -29053,6 +29994,7 @@
           <a:lstStyle/>
           <a:p>
             <a:pPr algn="ctr"/>
+            <a:endParaRPr/>
           </a:p>
         </p:txBody>
       </p:sp>
@@ -29124,6 +30066,96 @@
           </a:p>
         </p:txBody>
       </p:sp>
+      <p:pic>
+        <p:nvPicPr>
+          <p:cNvPr id="35" name="Picture 34">
+            <a:extLst>
+              <a:ext uri="{FF2B5EF4-FFF2-40B4-BE49-F238E27FC236}">
+                <a16:creationId xmlns:a16="http://schemas.microsoft.com/office/drawing/2014/main" id="{B6E255D2-36B3-3F6A-9009-B426F06D91C1}"/>
+              </a:ext>
+            </a:extLst>
+          </p:cNvPr>
+          <p:cNvPicPr>
+            <a:picLocks noChangeAspect="1"/>
+          </p:cNvPicPr>
+          <p:nvPr/>
+        </p:nvPicPr>
+        <p:blipFill>
+          <a:blip r:embed="rId3"/>
+          <a:stretch>
+            <a:fillRect/>
+          </a:stretch>
+        </p:blipFill>
+        <p:spPr>
+          <a:xfrm>
+            <a:off x="5661557" y="1209271"/>
+            <a:ext cx="5227526" cy="3007129"/>
+          </a:xfrm>
+          <a:prstGeom prst="rect">
+            <a:avLst/>
+          </a:prstGeom>
+        </p:spPr>
+      </p:pic>
+      <p:pic>
+        <p:nvPicPr>
+          <p:cNvPr id="39" name="Picture 38">
+            <a:extLst>
+              <a:ext uri="{FF2B5EF4-FFF2-40B4-BE49-F238E27FC236}">
+                <a16:creationId xmlns:a16="http://schemas.microsoft.com/office/drawing/2014/main" id="{ACF8FDB4-006B-F592-2149-87268C736345}"/>
+              </a:ext>
+            </a:extLst>
+          </p:cNvPr>
+          <p:cNvPicPr>
+            <a:picLocks noChangeAspect="1"/>
+          </p:cNvPicPr>
+          <p:nvPr/>
+        </p:nvPicPr>
+        <p:blipFill>
+          <a:blip r:embed="rId4"/>
+          <a:stretch>
+            <a:fillRect/>
+          </a:stretch>
+        </p:blipFill>
+        <p:spPr>
+          <a:xfrm>
+            <a:off x="8993191" y="4517136"/>
+            <a:ext cx="2640470" cy="1701110"/>
+          </a:xfrm>
+          <a:prstGeom prst="rect">
+            <a:avLst/>
+          </a:prstGeom>
+        </p:spPr>
+      </p:pic>
+      <p:pic>
+        <p:nvPicPr>
+          <p:cNvPr id="41" name="Picture 40">
+            <a:extLst>
+              <a:ext uri="{FF2B5EF4-FFF2-40B4-BE49-F238E27FC236}">
+                <a16:creationId xmlns:a16="http://schemas.microsoft.com/office/drawing/2014/main" id="{95045507-C28D-2E9F-E469-FCD5A91BABB6}"/>
+              </a:ext>
+            </a:extLst>
+          </p:cNvPr>
+          <p:cNvPicPr>
+            <a:picLocks noChangeAspect="1"/>
+          </p:cNvPicPr>
+          <p:nvPr/>
+        </p:nvPicPr>
+        <p:blipFill>
+          <a:blip r:embed="rId5"/>
+          <a:stretch>
+            <a:fillRect/>
+          </a:stretch>
+        </p:blipFill>
+        <p:spPr>
+          <a:xfrm>
+            <a:off x="4979323" y="4548436"/>
+            <a:ext cx="2751513" cy="1784488"/>
+          </a:xfrm>
+          <a:prstGeom prst="rect">
+            <a:avLst/>
+          </a:prstGeom>
+        </p:spPr>
+      </p:pic>
     </p:spTree>
   </p:cSld>
   <p:clrMapOvr>
@@ -29450,4 +30482,319 @@
   </a:objectDefaults>
   <a:extraClrSchemeLst/>
 </a:theme>
+</file>
+
+<file path=ppt/theme/theme2.xml><?xml version="1.0" encoding="utf-8"?>
+<a:theme xmlns:a="http://schemas.openxmlformats.org/drawingml/2006/main" name="Office Theme">
+  <a:themeElements>
+    <a:clrScheme name="Office">
+      <a:dk1>
+        <a:sysClr val="windowText" lastClr="000000"/>
+      </a:dk1>
+      <a:lt1>
+        <a:sysClr val="window" lastClr="FFFFFF"/>
+      </a:lt1>
+      <a:dk2>
+        <a:srgbClr val="0E2841"/>
+      </a:dk2>
+      <a:lt2>
+        <a:srgbClr val="E8E8E8"/>
+      </a:lt2>
+      <a:accent1>
+        <a:srgbClr val="156082"/>
+      </a:accent1>
+      <a:accent2>
+        <a:srgbClr val="E97132"/>
+      </a:accent2>
+      <a:accent3>
+        <a:srgbClr val="196B24"/>
+      </a:accent3>
+      <a:accent4>
+        <a:srgbClr val="0F9ED5"/>
+      </a:accent4>
+      <a:accent5>
+        <a:srgbClr val="A02B93"/>
+      </a:accent5>
+      <a:accent6>
+        <a:srgbClr val="4EA72E"/>
+      </a:accent6>
+      <a:hlink>
+        <a:srgbClr val="467886"/>
+      </a:hlink>
+      <a:folHlink>
+        <a:srgbClr val="96607D"/>
+      </a:folHlink>
+    </a:clrScheme>
+    <a:fontScheme name="Office">
+      <a:majorFont>
+        <a:latin typeface="Aptos Display" panose="02110004020202020204"/>
+        <a:ea typeface=""/>
+        <a:cs typeface=""/>
+        <a:font script="Jpan" typeface="游ゴシック Light"/>
+        <a:font script="Hang" typeface="맑은 고딕"/>
+        <a:font script="Hans" typeface="等线 Light"/>
+        <a:font script="Hant" typeface="新細明體"/>
+        <a:font script="Arab" typeface="Times New Roman"/>
+        <a:font script="Hebr" typeface="Times New Roman"/>
+        <a:font script="Thai" typeface="Angsana New"/>
+        <a:font script="Ethi" typeface="Nyala"/>
+        <a:font script="Beng" typeface="Vrinda"/>
+        <a:font script="Gujr" typeface="Shruti"/>
+        <a:font script="Khmr" typeface="MoolBoran"/>
+        <a:font script="Knda" typeface="Tunga"/>
+        <a:font script="Guru" typeface="Raavi"/>
+        <a:font script="Cans" typeface="Euphemia"/>
+        <a:font script="Cher" typeface="Plantagenet Cherokee"/>
+        <a:font script="Yiii" typeface="Microsoft Yi Baiti"/>
+        <a:font script="Tibt" typeface="Microsoft Himalaya"/>
+        <a:font script="Thaa" typeface="MV Boli"/>
+        <a:font script="Deva" typeface="Mangal"/>
+        <a:font script="Telu" typeface="Gautami"/>
+        <a:font script="Taml" typeface="Latha"/>
+        <a:font script="Syrc" typeface="Estrangelo Edessa"/>
+        <a:font script="Orya" typeface="Kalinga"/>
+        <a:font script="Mlym" typeface="Kartika"/>
+        <a:font script="Laoo" typeface="DokChampa"/>
+        <a:font script="Sinh" typeface="Iskoola Pota"/>
+        <a:font script="Mong" typeface="Mongolian Baiti"/>
+        <a:font script="Viet" typeface="Times New Roman"/>
+        <a:font script="Uigh" typeface="Microsoft Uighur"/>
+        <a:font script="Geor" typeface="Sylfaen"/>
+        <a:font script="Armn" typeface="Arial"/>
+        <a:font script="Bugi" typeface="Leelawadee UI"/>
+        <a:font script="Bopo" typeface="Microsoft JhengHei"/>
+        <a:font script="Java" typeface="Javanese Text"/>
+        <a:font script="Lisu" typeface="Segoe UI"/>
+        <a:font script="Mymr" typeface="Myanmar Text"/>
+        <a:font script="Nkoo" typeface="Ebrima"/>
+        <a:font script="Olck" typeface="Nirmala UI"/>
+        <a:font script="Osma" typeface="Ebrima"/>
+        <a:font script="Phag" typeface="Phagspa"/>
+        <a:font script="Syrn" typeface="Estrangelo Edessa"/>
+        <a:font script="Syrj" typeface="Estrangelo Edessa"/>
+        <a:font script="Syre" typeface="Estrangelo Edessa"/>
+        <a:font script="Sora" typeface="Nirmala UI"/>
+        <a:font script="Tale" typeface="Microsoft Tai Le"/>
+        <a:font script="Talu" typeface="Microsoft New Tai Lue"/>
+        <a:font script="Tfng" typeface="Ebrima"/>
+      </a:majorFont>
+      <a:minorFont>
+        <a:latin typeface="Aptos" panose="02110004020202020204"/>
+        <a:ea typeface=""/>
+        <a:cs typeface=""/>
+        <a:font script="Jpan" typeface="游ゴシック"/>
+        <a:font script="Hang" typeface="맑은 고딕"/>
+        <a:font script="Hans" typeface="等线"/>
+        <a:font script="Hant" typeface="新細明體"/>
+        <a:font script="Arab" typeface="Arial"/>
+        <a:font script="Hebr" typeface="Arial"/>
+        <a:font script="Thai" typeface="Cordia New"/>
+        <a:font script="Ethi" typeface="Nyala"/>
+        <a:font script="Beng" typeface="Vrinda"/>
+        <a:font script="Gujr" typeface="Shruti"/>
+        <a:font script="Khmr" typeface="DaunPenh"/>
+        <a:font script="Knda" typeface="Tunga"/>
+        <a:font script="Guru" typeface="Raavi"/>
+        <a:font script="Cans" typeface="Euphemia"/>
+        <a:font script="Cher" typeface="Plantagenet Cherokee"/>
+        <a:font script="Yiii" typeface="Microsoft Yi Baiti"/>
+        <a:font script="Tibt" typeface="Microsoft Himalaya"/>
+        <a:font script="Thaa" typeface="MV Boli"/>
+        <a:font script="Deva" typeface="Mangal"/>
+        <a:font script="Telu" typeface="Gautami"/>
+        <a:font script="Taml" typeface="Latha"/>
+        <a:font script="Syrc" typeface="Estrangelo Edessa"/>
+        <a:font script="Orya" typeface="Kalinga"/>
+        <a:font script="Mlym" typeface="Kartika"/>
+        <a:font script="Laoo" typeface="DokChampa"/>
+        <a:font script="Sinh" typeface="Iskoola Pota"/>
+        <a:font script="Mong" typeface="Mongolian Baiti"/>
+        <a:font script="Viet" typeface="Arial"/>
+        <a:font script="Uigh" typeface="Microsoft Uighur"/>
+        <a:font script="Geor" typeface="Sylfaen"/>
+        <a:font script="Armn" typeface="Arial"/>
+        <a:font script="Bugi" typeface="Leelawadee UI"/>
+        <a:font script="Bopo" typeface="Microsoft JhengHei"/>
+        <a:font script="Java" typeface="Javanese Text"/>
+        <a:font script="Lisu" typeface="Segoe UI"/>
+        <a:font script="Mymr" typeface="Myanmar Text"/>
+        <a:font script="Nkoo" typeface="Ebrima"/>
+        <a:font script="Olck" typeface="Nirmala UI"/>
+        <a:font script="Osma" typeface="Ebrima"/>
+        <a:font script="Phag" typeface="Phagspa"/>
+        <a:font script="Syrn" typeface="Estrangelo Edessa"/>
+        <a:font script="Syrj" typeface="Estrangelo Edessa"/>
+        <a:font script="Syre" typeface="Estrangelo Edessa"/>
+        <a:font script="Sora" typeface="Nirmala UI"/>
+        <a:font script="Tale" typeface="Microsoft Tai Le"/>
+        <a:font script="Talu" typeface="Microsoft New Tai Lue"/>
+        <a:font script="Tfng" typeface="Ebrima"/>
+      </a:minorFont>
+    </a:fontScheme>
+    <a:fmtScheme name="Office">
+      <a:fillStyleLst>
+        <a:solidFill>
+          <a:schemeClr val="phClr"/>
+        </a:solidFill>
+        <a:gradFill rotWithShape="1">
+          <a:gsLst>
+            <a:gs pos="0">
+              <a:schemeClr val="phClr">
+                <a:lumMod val="110000"/>
+                <a:satMod val="105000"/>
+                <a:tint val="67000"/>
+              </a:schemeClr>
+            </a:gs>
+            <a:gs pos="50000">
+              <a:schemeClr val="phClr">
+                <a:lumMod val="105000"/>
+                <a:satMod val="103000"/>
+                <a:tint val="73000"/>
+              </a:schemeClr>
+            </a:gs>
+            <a:gs pos="100000">
+              <a:schemeClr val="phClr">
+                <a:lumMod val="105000"/>
+                <a:satMod val="109000"/>
+                <a:tint val="81000"/>
+              </a:schemeClr>
+            </a:gs>
+          </a:gsLst>
+          <a:lin ang="5400000" scaled="0"/>
+        </a:gradFill>
+        <a:gradFill rotWithShape="1">
+          <a:gsLst>
+            <a:gs pos="0">
+              <a:schemeClr val="phClr">
+                <a:satMod val="103000"/>
+                <a:lumMod val="102000"/>
+                <a:tint val="94000"/>
+              </a:schemeClr>
+            </a:gs>
+            <a:gs pos="50000">
+              <a:schemeClr val="phClr">
+                <a:satMod val="110000"/>
+                <a:lumMod val="100000"/>
+                <a:shade val="100000"/>
+              </a:schemeClr>
+            </a:gs>
+            <a:gs pos="100000">
+              <a:schemeClr val="phClr">
+                <a:lumMod val="99000"/>
+                <a:satMod val="120000"/>
+                <a:shade val="78000"/>
+              </a:schemeClr>
+            </a:gs>
+          </a:gsLst>
+          <a:lin ang="5400000" scaled="0"/>
+        </a:gradFill>
+      </a:fillStyleLst>
+      <a:lnStyleLst>
+        <a:ln w="12700" cap="flat" cmpd="sng" algn="ctr">
+          <a:solidFill>
+            <a:schemeClr val="phClr"/>
+          </a:solidFill>
+          <a:prstDash val="solid"/>
+          <a:miter lim="800000"/>
+        </a:ln>
+        <a:ln w="19050" cap="flat" cmpd="sng" algn="ctr">
+          <a:solidFill>
+            <a:schemeClr val="phClr"/>
+          </a:solidFill>
+          <a:prstDash val="solid"/>
+          <a:miter lim="800000"/>
+        </a:ln>
+        <a:ln w="25400" cap="flat" cmpd="sng" algn="ctr">
+          <a:solidFill>
+            <a:schemeClr val="phClr"/>
+          </a:solidFill>
+          <a:prstDash val="solid"/>
+          <a:miter lim="800000"/>
+        </a:ln>
+      </a:lnStyleLst>
+      <a:effectStyleLst>
+        <a:effectStyle>
+          <a:effectLst/>
+        </a:effectStyle>
+        <a:effectStyle>
+          <a:effectLst/>
+        </a:effectStyle>
+        <a:effectStyle>
+          <a:effectLst>
+            <a:outerShdw blurRad="57150" dist="19050" dir="5400000" algn="ctr" rotWithShape="0">
+              <a:srgbClr val="000000">
+                <a:alpha val="63000"/>
+              </a:srgbClr>
+            </a:outerShdw>
+          </a:effectLst>
+        </a:effectStyle>
+      </a:effectStyleLst>
+      <a:bgFillStyleLst>
+        <a:solidFill>
+          <a:schemeClr val="phClr"/>
+        </a:solidFill>
+        <a:solidFill>
+          <a:schemeClr val="phClr">
+            <a:tint val="95000"/>
+            <a:satMod val="170000"/>
+          </a:schemeClr>
+        </a:solidFill>
+        <a:gradFill rotWithShape="1">
+          <a:gsLst>
+            <a:gs pos="0">
+              <a:schemeClr val="phClr">
+                <a:tint val="93000"/>
+                <a:satMod val="150000"/>
+                <a:shade val="98000"/>
+                <a:lumMod val="102000"/>
+              </a:schemeClr>
+            </a:gs>
+            <a:gs pos="50000">
+              <a:schemeClr val="phClr">
+                <a:tint val="98000"/>
+                <a:satMod val="130000"/>
+                <a:shade val="90000"/>
+                <a:lumMod val="103000"/>
+              </a:schemeClr>
+            </a:gs>
+            <a:gs pos="100000">
+              <a:schemeClr val="phClr">
+                <a:shade val="63000"/>
+                <a:satMod val="120000"/>
+              </a:schemeClr>
+            </a:gs>
+          </a:gsLst>
+          <a:lin ang="5400000" scaled="0"/>
+        </a:gradFill>
+      </a:bgFillStyleLst>
+    </a:fmtScheme>
+  </a:themeElements>
+  <a:objectDefaults>
+    <a:lnDef>
+      <a:spPr/>
+      <a:bodyPr/>
+      <a:lstStyle/>
+      <a:style>
+        <a:lnRef idx="2">
+          <a:schemeClr val="accent1"/>
+        </a:lnRef>
+        <a:fillRef idx="0">
+          <a:schemeClr val="accent1"/>
+        </a:fillRef>
+        <a:effectRef idx="1">
+          <a:schemeClr val="accent1"/>
+        </a:effectRef>
+        <a:fontRef idx="minor">
+          <a:schemeClr val="tx1"/>
+        </a:fontRef>
+      </a:style>
+    </a:lnDef>
+  </a:objectDefaults>
+  <a:extraClrSchemeLst/>
+  <a:extLst>
+    <a:ext uri="{05A4C25C-085E-4340-85A3-A5531E510DB2}">
+      <thm15:themeFamily xmlns:thm15="http://schemas.microsoft.com/office/thememl/2012/main" name="Office Theme" id="{2E142A2C-CD16-42D6-873A-C26D2A0506FA}" vid="{1BDDFF52-6CD6-40A5-AB3C-68EB2F1E4D0A}"/>
+    </a:ext>
+  </a:extLst>
+</a:theme>
 </file>